--- a/docs/ClientPro_HuongDanSuDung.pptx
+++ b/docs/ClientPro_HuongDanSuDung.pptx
@@ -24,6 +24,11 @@
     <p:sldId id="272" r:id="rId23"/>
     <p:sldId id="273" r:id="rId24"/>
     <p:sldId id="274" r:id="rId25"/>
+    <p:sldId id="275" r:id="rId26"/>
+    <p:sldId id="276" r:id="rId27"/>
+    <p:sldId id="277" r:id="rId28"/>
+    <p:sldId id="278" r:id="rId29"/>
+    <p:sldId id="279" r:id="rId30"/>
   </p:sldIdLst>
   <p:sldSz cx="12191695" cy="6858000" type="screen4x3"/>
   <p:notesSz cx="6858000" cy="9144000"/>
@@ -3513,7 +3518,7 @@
         <p:spPr>
           <a:xfrm>
             <a:off x="1463040" y="438912"/>
-            <a:ext cx="6949440" cy="868680"/>
+            <a:ext cx="7406640" cy="868680"/>
           </a:xfrm>
           <a:prstGeom prst="rect">
             <a:avLst/>
@@ -3877,7 +3882,7 @@
         <p:spPr>
           <a:xfrm>
             <a:off x="1463040" y="438912"/>
-            <a:ext cx="6949440" cy="868680"/>
+            <a:ext cx="7406640" cy="868680"/>
           </a:xfrm>
           <a:prstGeom prst="rect">
             <a:avLst/>
@@ -4194,7 +4199,7 @@
         <p:spPr>
           <a:xfrm>
             <a:off x="1463040" y="438912"/>
-            <a:ext cx="6949440" cy="868680"/>
+            <a:ext cx="7406640" cy="868680"/>
           </a:xfrm>
           <a:prstGeom prst="rect">
             <a:avLst/>
@@ -4542,7 +4547,7 @@
         <p:spPr>
           <a:xfrm>
             <a:off x="1463040" y="438912"/>
-            <a:ext cx="6949440" cy="868680"/>
+            <a:ext cx="7406640" cy="868680"/>
           </a:xfrm>
           <a:prstGeom prst="rect">
             <a:avLst/>
@@ -4929,7 +4934,7 @@
         <p:spPr>
           <a:xfrm>
             <a:off x="1463040" y="438912"/>
-            <a:ext cx="6949440" cy="868680"/>
+            <a:ext cx="4846320" cy="868680"/>
           </a:xfrm>
           <a:prstGeom prst="rect">
             <a:avLst/>
@@ -4948,12 +4953,12 @@
               </a:spcAft>
             </a:pPr>
             <a:r>
-              <a:rPr sz="2700" b="1">
+              <a:rPr sz="2200" b="1">
                 <a:solidFill>
                   <a:srgbClr val="0B2A4A"/>
                 </a:solidFill>
               </a:rPr>
-              <a:t>Thêm tài sản bảo đảm (TSBĐ)</a:t>
+              <a:t>Chụp ảnh, nén ảnh &amp; quản lý ảnh</a:t>
             </a:r>
           </a:p>
         </p:txBody>
@@ -4967,7 +4972,7 @@
         <p:spPr>
           <a:xfrm>
             <a:off x="566928" y="1600200"/>
-            <a:ext cx="7406640" cy="4480560"/>
+            <a:ext cx="5394960" cy="4480560"/>
           </a:xfrm>
           <a:prstGeom prst="rect">
             <a:avLst/>
@@ -4994,12 +4999,20 @@
               <a:t>▪ </a:t>
             </a:r>
             <a:r>
+              <a:rPr sz="1500" b="1">
+                <a:solidFill>
+                  <a:srgbClr val="28303C"/>
+                </a:solidFill>
+              </a:rPr>
+              <a:t>Chụp trong app: </a:t>
+            </a:r>
+            <a:r>
               <a:rPr sz="1500" b="0">
                 <a:solidFill>
                   <a:srgbClr val="28303C"/>
                 </a:solidFill>
               </a:rPr>
-              <a:t>Trong chi tiết khách hàng → tab TÀI SẢN → “Thêm TSBĐ Mới”.</a:t>
+              <a:t>nút “Chụp” mở camera (ưu tiên camera sau, tới ~1920px) — chụp giấy tờ nét.</a:t>
             </a:r>
           </a:p>
           <a:p>
@@ -5017,12 +5030,20 @@
               <a:t>▪ </a:t>
             </a:r>
             <a:r>
+              <a:rPr sz="1500" b="1">
+                <a:solidFill>
+                  <a:srgbClr val="28303C"/>
+                </a:solidFill>
+              </a:rPr>
+              <a:t>Thêm từ thư viện: </a:t>
+            </a:r>
+            <a:r>
               <a:rPr sz="1500" b="0">
                 <a:solidFill>
                   <a:srgbClr val="28303C"/>
                 </a:solidFill>
               </a:rPr>
-              <a:t>Điền Mô tả, Định giá, Vay tối đa, Diện tích, Mặt tiền, Năm xây dựng.</a:t>
+              <a:t>nút tải lên chọn nhiều ảnh cùng lúc.</a:t>
             </a:r>
           </a:p>
           <a:p>
@@ -5045,7 +5066,7 @@
                   <a:srgbClr val="28303C"/>
                 </a:solidFill>
               </a:rPr>
-              <a:t>Vị trí/tọa độ: </a:t>
+              <a:t>Nén tự động: </a:t>
             </a:r>
             <a:r>
               <a:rPr sz="1500" b="0">
@@ -5053,7 +5074,7 @@
                   <a:srgbClr val="28303C"/>
                 </a:solidFill>
               </a:rPr>
-              <a:t>nút lấy tọa độ GPS hiện tại để hiển thị lên bản đồ.</a:t>
+              <a:t>mọi ảnh thu về tối đa 2200px, ~500–700KB/ảnh — nét chữ mà nhẹ dung lượng.</a:t>
             </a:r>
           </a:p>
           <a:p>
@@ -5071,19 +5092,27 @@
               <a:t>▪ </a:t>
             </a:r>
             <a:r>
+              <a:rPr sz="1500" b="1">
+                <a:solidFill>
+                  <a:srgbClr val="28303C"/>
+                </a:solidFill>
+              </a:rPr>
+              <a:t>Kho riêng: </a:t>
+            </a:r>
+            <a:r>
               <a:rPr sz="1500" b="0">
                 <a:solidFill>
                   <a:srgbClr val="28303C"/>
                 </a:solidFill>
               </a:rPr>
-              <a:t>Sau khi lưu, tài sản hiện thành thẻ kèm nút sửa/xóa, kho ảnh riêng và tra cứu giá tham khảo.</a:t>
+              <a:t>ảnh hồ sơ KH và “Kho Ảnh TSBĐ” của từng tài sản tách biệt nhau.</a:t>
             </a:r>
           </a:p>
         </p:txBody>
       </p:sp>
       <p:pic>
         <p:nvPicPr>
-          <p:cNvPr id="7" name="Picture 6" descr="08b_assets_tab.png"/>
+          <p:cNvPr id="7" name="Picture 6" descr="13b_select_images.png"/>
           <p:cNvPicPr>
             <a:picLocks noChangeAspect="1"/>
           </p:cNvPicPr>
@@ -5097,8 +5126,8 @@
         </p:blipFill>
         <p:spPr>
           <a:xfrm>
-            <a:off x="8945792" y="411480"/>
-            <a:ext cx="2788703" cy="6035040"/>
+            <a:off x="9245031" y="685800"/>
+            <a:ext cx="2535185" cy="5486400"/>
           </a:xfrm>
           <a:prstGeom prst="rect">
             <a:avLst/>
@@ -5112,7 +5141,7 @@
       </p:pic>
       <p:pic>
         <p:nvPicPr>
-          <p:cNvPr id="8" name="Picture 7" descr="08_asset_modal.png"/>
+          <p:cNvPr id="8" name="Picture 7" descr="13_images_tab.png"/>
           <p:cNvPicPr>
             <a:picLocks noChangeAspect="1"/>
           </p:cNvPicPr>
@@ -5126,8 +5155,8 @@
         </p:blipFill>
         <p:spPr>
           <a:xfrm>
-            <a:off x="5928489" y="411480"/>
-            <a:ext cx="2788703" cy="6035040"/>
+            <a:off x="6508679" y="685800"/>
+            <a:ext cx="2535185" cy="5486400"/>
           </a:xfrm>
           <a:prstGeom prst="rect">
             <a:avLst/>
@@ -5292,7 +5321,7 @@
                   <a:srgbClr val="FFFFFF"/>
                 </a:solidFill>
               </a:rPr>
-              <a:t>9</a:t>
+              <a:t>8</a:t>
             </a:r>
           </a:p>
         </p:txBody>
@@ -5306,7 +5335,7 @@
         <p:spPr>
           <a:xfrm>
             <a:off x="1463040" y="438912"/>
-            <a:ext cx="6949440" cy="868680"/>
+            <a:ext cx="4846320" cy="868680"/>
           </a:xfrm>
           <a:prstGeom prst="rect">
             <a:avLst/>
@@ -5325,12 +5354,12 @@
               </a:spcAft>
             </a:pPr>
             <a:r>
-              <a:rPr sz="2700" b="1">
+              <a:rPr sz="2200" b="1">
                 <a:solidFill>
                   <a:srgbClr val="0B2A4A"/>
                 </a:solidFill>
               </a:rPr>
-              <a:t>Bản đồ &amp; chỉ đường</a:t>
+              <a:t>Xem, gửi &amp; tải ảnh</a:t>
             </a:r>
           </a:p>
         </p:txBody>
@@ -5344,7 +5373,7 @@
         <p:spPr>
           <a:xfrm>
             <a:off x="566928" y="1600200"/>
-            <a:ext cx="7406640" cy="4480560"/>
+            <a:ext cx="5394960" cy="4480560"/>
           </a:xfrm>
           <a:prstGeom prst="rect">
             <a:avLst/>
@@ -5371,12 +5400,20 @@
               <a:t>▪ </a:t>
             </a:r>
             <a:r>
+              <a:rPr sz="1500" b="1">
+                <a:solidFill>
+                  <a:srgbClr val="28303C"/>
+                </a:solidFill>
+              </a:rPr>
+              <a:t>Xem phóng to: </a:t>
+            </a:r>
+            <a:r>
               <a:rPr sz="1500" b="0">
                 <a:solidFill>
                   <a:srgbClr val="28303C"/>
                 </a:solidFill>
               </a:rPr>
-              <a:t>Mở từ Thao tác nhanh → “Bản đồ”.</a:t>
+              <a:t>chạm ảnh mở lightbox — vuốt chuyển ảnh, nút chia sẻ, nút xóa.</a:t>
             </a:r>
           </a:p>
           <a:p>
@@ -5399,7 +5436,7 @@
                   <a:srgbClr val="28303C"/>
                 </a:solidFill>
               </a:rPr>
-              <a:t>Đổi lớp bản đồ: </a:t>
+              <a:t>Chọn nhiều: </a:t>
             </a:r>
             <a:r>
               <a:rPr sz="1500" b="0">
@@ -5407,7 +5444,7 @@
                   <a:srgbClr val="28303C"/>
                 </a:solidFill>
               </a:rPr>
-              <a:t>“Bản đồ tối” hoặc “Vệ tinh” (góc phải trên).</a:t>
+              <a:t>nhấn giữ 1 ảnh để vào chế độ chọn; thanh công cụ hiện số ảnh đã chọn.</a:t>
             </a:r>
           </a:p>
           <a:p>
@@ -5430,7 +5467,7 @@
                   <a:srgbClr val="28303C"/>
                 </a:solidFill>
               </a:rPr>
-              <a:t>Nút định vị: </a:t>
+              <a:t>Gửi / tải về: </a:t>
             </a:r>
             <a:r>
               <a:rPr sz="1500" b="0">
@@ -5438,7 +5475,7 @@
                   <a:srgbClr val="28303C"/>
                 </a:solidFill>
               </a:rPr>
-              <a:t>quay về vị trí hiện tại của bạn (góc phải dưới).</a:t>
+              <a:t>nút “Gửi” mở bảng chia sẻ hệ điều hành → Zalo, Email, hoặc “Lưu về máy”.</a:t>
             </a:r>
           </a:p>
           <a:p>
@@ -5456,19 +5493,27 @@
               <a:t>▪ </a:t>
             </a:r>
             <a:r>
+              <a:rPr sz="1500" b="1">
+                <a:solidFill>
+                  <a:srgbClr val="28303C"/>
+                </a:solidFill>
+              </a:rPr>
+              <a:t>Lên Drive: </a:t>
+            </a:r>
+            <a:r>
               <a:rPr sz="1500" b="0">
                 <a:solidFill>
                   <a:srgbClr val="28303C"/>
                 </a:solidFill>
               </a:rPr>
-              <a:t>Khách hàng/tài sản có tọa độ sẽ hiện marker — chạm để xem thông tin &amp; chỉ đường.</a:t>
+              <a:t>nút “Up Drive” đẩy toàn bộ ảnh hồ sơ KH lên Google Drive cá nhân.</a:t>
             </a:r>
           </a:p>
         </p:txBody>
       </p:sp>
       <p:pic>
         <p:nvPicPr>
-          <p:cNvPr id="7" name="Picture 6" descr="09_map.png"/>
+          <p:cNvPr id="7" name="Picture 6" descr="15_camera.png"/>
           <p:cNvPicPr>
             <a:picLocks noChangeAspect="1"/>
           </p:cNvPicPr>
@@ -5482,8 +5527,37 @@
         </p:blipFill>
         <p:spPr>
           <a:xfrm>
-            <a:off x="8900072" y="411480"/>
-            <a:ext cx="2788703" cy="6035040"/>
+            <a:off x="9245031" y="685800"/>
+            <a:ext cx="2535185" cy="5486400"/>
+          </a:xfrm>
+          <a:prstGeom prst="rect">
+            <a:avLst/>
+          </a:prstGeom>
+          <a:ln w="12700">
+            <a:solidFill>
+              <a:srgbClr val="C9D6E4"/>
+            </a:solidFill>
+          </a:ln>
+        </p:spPr>
+      </p:pic>
+      <p:pic>
+        <p:nvPicPr>
+          <p:cNvPr id="8" name="Picture 7" descr="14_lightbox.png"/>
+          <p:cNvPicPr>
+            <a:picLocks noChangeAspect="1"/>
+          </p:cNvPicPr>
+          <p:nvPr/>
+        </p:nvPicPr>
+        <p:blipFill>
+          <a:blip r:embed="rId3"/>
+          <a:stretch>
+            <a:fillRect/>
+          </a:stretch>
+        </p:blipFill>
+        <p:spPr>
+          <a:xfrm>
+            <a:off x="6508679" y="685800"/>
+            <a:ext cx="2535185" cy="5486400"/>
           </a:xfrm>
           <a:prstGeom prst="rect">
             <a:avLst/>
@@ -5648,7 +5722,7 @@
                   <a:srgbClr val="FFFFFF"/>
                 </a:solidFill>
               </a:rPr>
-              <a:t>10</a:t>
+              <a:t>9</a:t>
             </a:r>
           </a:p>
         </p:txBody>
@@ -5662,7 +5736,7 @@
         <p:spPr>
           <a:xfrm>
             <a:off x="1463040" y="438912"/>
-            <a:ext cx="6949440" cy="868680"/>
+            <a:ext cx="4846320" cy="868680"/>
           </a:xfrm>
           <a:prstGeom prst="rect">
             <a:avLst/>
@@ -5681,12 +5755,12 @@
               </a:spcAft>
             </a:pPr>
             <a:r>
-              <a:rPr sz="2700" b="1">
+              <a:rPr sz="2200" b="1">
                 <a:solidFill>
                   <a:srgbClr val="0B2A4A"/>
                 </a:solidFill>
               </a:rPr>
-              <a:t>Menu cài đặt &amp; giao diện</a:t>
+              <a:t>Thêm &amp; quản lý tài sản bảo đảm (TSBĐ)</a:t>
             </a:r>
           </a:p>
         </p:txBody>
@@ -5700,7 +5774,7 @@
         <p:spPr>
           <a:xfrm>
             <a:off x="566928" y="1600200"/>
-            <a:ext cx="7406640" cy="4480560"/>
+            <a:ext cx="5394960" cy="4480560"/>
           </a:xfrm>
           <a:prstGeom prst="rect">
             <a:avLst/>
@@ -5732,7 +5806,7 @@
                   <a:srgbClr val="28303C"/>
                 </a:solidFill>
               </a:rPr>
-              <a:t>Mở bằng nút bánh răng góc phải màn hình chính.</a:t>
+              <a:t>Chi tiết KH → tab TÀI SẢN → “Thêm TSBĐ Mới”.</a:t>
             </a:r>
           </a:p>
           <a:p>
@@ -5755,7 +5829,7 @@
                   <a:srgbClr val="28303C"/>
                 </a:solidFill>
               </a:rPr>
-              <a:t>Giao diện: </a:t>
+              <a:t>Nhập: </a:t>
             </a:r>
             <a:r>
               <a:rPr sz="1500" b="0">
@@ -5763,7 +5837,7 @@
                   <a:srgbClr val="28303C"/>
                 </a:solidFill>
               </a:rPr>
-              <a:t>nhiều bộ màu (xanh ngân hàng, tối, hoàng hôn, đại dương…), đổi ngay và được ghi nhớ.</a:t>
+              <a:t>Mô tả chính, Định giá (Trđ), Vay Max, Diện tích, Mặt tiền, Năm xây dựng, ghi chú.</a:t>
             </a:r>
           </a:p>
           <a:p>
@@ -5786,7 +5860,7 @@
                   <a:srgbClr val="28303C"/>
                 </a:solidFill>
               </a:rPr>
-              <a:t>Bảo mật: </a:t>
+              <a:t>Thẻ tài sản: </a:t>
             </a:r>
             <a:r>
               <a:rPr sz="1500" b="0">
@@ -5794,7 +5868,7 @@
                   <a:srgbClr val="28303C"/>
                 </a:solidFill>
               </a:rPr>
-              <a:t>bật Face ID / vân tay, đổi mã PIN.</a:t>
+              <a:t>nhãn diện tích/mặt tiền/năm, dòng ĐG &amp; Vay; nút sửa, xóa.</a:t>
             </a:r>
           </a:p>
           <a:p>
@@ -5817,7 +5891,7 @@
                   <a:srgbClr val="28303C"/>
                 </a:solidFill>
               </a:rPr>
-              <a:t>Donate: </a:t>
+              <a:t>3 nút chức năng: </a:t>
             </a:r>
             <a:r>
               <a:rPr sz="1500" b="0">
@@ -5825,14 +5899,14 @@
                   <a:srgbClr val="28303C"/>
                 </a:solidFill>
               </a:rPr>
-              <a:t>ủng hộ tác giả ứng dụng.</a:t>
+              <a:t>Bản đồ (mở Google Maps), Tham khảo (so giá), Kho Ảnh TSBĐ.</a:t>
             </a:r>
           </a:p>
         </p:txBody>
       </p:sp>
       <p:pic>
         <p:nvPicPr>
-          <p:cNvPr id="7" name="Picture 6" descr="10_menu.png"/>
+          <p:cNvPr id="7" name="Picture 6" descr="08b_assets_tab.png"/>
           <p:cNvPicPr>
             <a:picLocks noChangeAspect="1"/>
           </p:cNvPicPr>
@@ -5846,8 +5920,37 @@
         </p:blipFill>
         <p:spPr>
           <a:xfrm>
-            <a:off x="8900072" y="411480"/>
-            <a:ext cx="2788703" cy="6035040"/>
+            <a:off x="9245031" y="685800"/>
+            <a:ext cx="2535185" cy="5486400"/>
+          </a:xfrm>
+          <a:prstGeom prst="rect">
+            <a:avLst/>
+          </a:prstGeom>
+          <a:ln w="12700">
+            <a:solidFill>
+              <a:srgbClr val="C9D6E4"/>
+            </a:solidFill>
+          </a:ln>
+        </p:spPr>
+      </p:pic>
+      <p:pic>
+        <p:nvPicPr>
+          <p:cNvPr id="8" name="Picture 7" descr="08_asset_modal.png"/>
+          <p:cNvPicPr>
+            <a:picLocks noChangeAspect="1"/>
+          </p:cNvPicPr>
+          <p:nvPr/>
+        </p:nvPicPr>
+        <p:blipFill>
+          <a:blip r:embed="rId3"/>
+          <a:stretch>
+            <a:fillRect/>
+          </a:stretch>
+        </p:blipFill>
+        <p:spPr>
+          <a:xfrm>
+            <a:off x="6508679" y="685800"/>
+            <a:ext cx="2535185" cy="5486400"/>
           </a:xfrm>
           <a:prstGeom prst="rect">
             <a:avLst/>
@@ -6012,7 +6115,7 @@
                   <a:srgbClr val="FFFFFF"/>
                 </a:solidFill>
               </a:rPr>
-              <a:t>11</a:t>
+              <a:t>10</a:t>
             </a:r>
           </a:p>
         </p:txBody>
@@ -6026,7 +6129,7 @@
         <p:spPr>
           <a:xfrm>
             <a:off x="1463040" y="438912"/>
-            <a:ext cx="6949440" cy="868680"/>
+            <a:ext cx="7406640" cy="868680"/>
           </a:xfrm>
           <a:prstGeom prst="rect">
             <a:avLst/>
@@ -6050,7 +6153,7 @@
                   <a:srgbClr val="0B2A4A"/>
                 </a:solidFill>
               </a:rPr>
-              <a:t>Sao lưu &amp; khôi phục</a:t>
+              <a:t>Định vị tài sản — lấy tọa độ GPS</a:t>
             </a:r>
           </a:p>
         </p:txBody>
@@ -6091,20 +6194,12 @@
               <a:t>▪ </a:t>
             </a:r>
             <a:r>
-              <a:rPr sz="1500" b="1">
-                <a:solidFill>
-                  <a:srgbClr val="28303C"/>
-                </a:solidFill>
-              </a:rPr>
-              <a:t>Backup lên Drive: </a:t>
-            </a:r>
-            <a:r>
               <a:rPr sz="1500" b="0">
                 <a:solidFill>
                   <a:srgbClr val="28303C"/>
                 </a:solidFill>
               </a:rPr>
-              <a:t>“Sao lưu lên Drive” — cần cấu hình Link GAS cá nhân + token trong “Cài đặt Google Drive”; app tự backup hằng ngày, giữ 3 bản.</a:t>
+              <a:t>Tọa độ để hiện marker trên bản đồ, mở Google Maps và bật được Tham khảo giá.</a:t>
             </a:r>
           </a:p>
           <a:p>
@@ -6127,7 +6222,7 @@
                   <a:srgbClr val="28303C"/>
                 </a:solidFill>
               </a:rPr>
-              <a:t>Trong máy: </a:t>
+              <a:t>Cách 1 — GPS tại chỗ: </a:t>
             </a:r>
             <a:r>
               <a:rPr sz="1500" b="0">
@@ -6135,7 +6230,7 @@
                   <a:srgbClr val="28303C"/>
                 </a:solidFill>
               </a:rPr>
-              <a:t>“Tạo &amp; xuất file” ra file .cpb mã hóa; “Nhập file .cpb” để khôi phục.</a:t>
+              <a:t>đứng tại tài sản, nhấn nút ghim → app dò GPS đa tầng, tự điền tọa độ + báo sai số.</a:t>
             </a:r>
           </a:p>
           <a:p>
@@ -6158,7 +6253,7 @@
                   <a:srgbClr val="28303C"/>
                 </a:solidFill>
               </a:rPr>
-              <a:t>Đổi máy: </a:t>
+              <a:t>Cách 2 — Dán link: </a:t>
             </a:r>
             <a:r>
               <a:rPr sz="1500" b="0">
@@ -6166,7 +6261,69 @@
                   <a:srgbClr val="28303C"/>
                 </a:solidFill>
               </a:rPr>
-              <a:t>“Nhận từ user” — nhận bản sao lưu gửi qua cloud từ máy cũ.</a:t>
+              <a:t>sao chép link Google Maps của vị trí và dán vào ô.</a:t>
+            </a:r>
+          </a:p>
+          <a:p>
+            <a:pPr algn="l">
+              <a:spcAft>
+                <a:spcPts val="600"/>
+              </a:spcAft>
+            </a:pPr>
+            <a:r>
+              <a:rPr sz="1500" b="1">
+                <a:solidFill>
+                  <a:srgbClr val="005B9F"/>
+                </a:solidFill>
+              </a:rPr>
+              <a:t>▪ </a:t>
+            </a:r>
+            <a:r>
+              <a:rPr sz="1500" b="1">
+                <a:solidFill>
+                  <a:srgbClr val="28303C"/>
+                </a:solidFill>
+              </a:rPr>
+              <a:t>Cách 3 — Nhập thô: </a:t>
+            </a:r>
+            <a:r>
+              <a:rPr sz="1500" b="0">
+                <a:solidFill>
+                  <a:srgbClr val="28303C"/>
+                </a:solidFill>
+              </a:rPr>
+              <a:t>gõ “vĩ độ, kinh độ” (VD: 10.7411, 106.7220).</a:t>
+            </a:r>
+          </a:p>
+          <a:p>
+            <a:pPr algn="l">
+              <a:spcAft>
+                <a:spcPts val="600"/>
+              </a:spcAft>
+            </a:pPr>
+            <a:r>
+              <a:rPr sz="1500" b="1">
+                <a:solidFill>
+                  <a:srgbClr val="005B9F"/>
+                </a:solidFill>
+              </a:rPr>
+              <a:t>▪ </a:t>
+            </a:r>
+            <a:r>
+              <a:rPr sz="1500" b="1">
+                <a:solidFill>
+                  <a:srgbClr val="28303C"/>
+                </a:solidFill>
+              </a:rPr>
+              <a:t>Nút “?”: </a:t>
+            </a:r>
+            <a:r>
+              <a:rPr sz="1500" b="0">
+                <a:solidFill>
+                  <a:srgbClr val="28303C"/>
+                </a:solidFill>
+              </a:rPr>
+              <a:t>mở hướng dẫn lấy tọa độ ngay trong app.</a:t>
             </a:r>
           </a:p>
         </p:txBody>
@@ -6218,14 +6375,14 @@
                   <a:srgbClr val="555D6B"/>
                 </a:solidFill>
               </a:rPr>
-              <a:t>💡 Không chia sẻ file backup cho người khác dù đã mã hóa.</a:t>
+              <a:t>💡 Cần cấp quyền vị trí và bật GPS; trong nhà kín tín hiệu có thể chậm hơn.</a:t>
             </a:r>
           </a:p>
         </p:txBody>
       </p:sp>
       <p:pic>
         <p:nvPicPr>
-          <p:cNvPr id="8" name="Picture 7" descr="11_backup_manager.png"/>
+          <p:cNvPr id="8" name="Picture 7" descr="08_asset_modal.png"/>
           <p:cNvPicPr>
             <a:picLocks noChangeAspect="1"/>
           </p:cNvPicPr>
@@ -6360,14 +6517,66 @@
       </p:sp>
       <p:sp>
         <p:nvSpPr>
-          <p:cNvPr id="4" name="TextBox 3"/>
+          <p:cNvPr id="4" name="Rectangle 3"/>
+          <p:cNvSpPr/>
+          <p:nvPr/>
+        </p:nvSpPr>
+        <p:spPr>
+          <a:xfrm>
+            <a:off x="502920" y="457200"/>
+            <a:ext cx="777240" cy="777240"/>
+          </a:xfrm>
+          <a:prstGeom prst="rect">
+            <a:avLst/>
+          </a:prstGeom>
+          <a:solidFill>
+            <a:srgbClr val="005B9F"/>
+          </a:solidFill>
+          <a:ln>
+            <a:noFill/>
+          </a:ln>
+          <a:effectLst/>
+        </p:spPr>
+        <p:style>
+          <a:lnRef idx="1">
+            <a:schemeClr val="accent1"/>
+          </a:lnRef>
+          <a:fillRef idx="3">
+            <a:schemeClr val="accent1"/>
+          </a:fillRef>
+          <a:effectRef idx="2">
+            <a:schemeClr val="accent1"/>
+          </a:effectRef>
+          <a:fontRef idx="minor">
+            <a:schemeClr val="lt1"/>
+          </a:fontRef>
+        </p:style>
+        <p:txBody>
+          <a:bodyPr rtlCol="0" anchor="ctr" wrap="none"/>
+          <a:lstStyle/>
+          <a:p>
+            <a:pPr algn="ctr"/>
+            <a:r>
+              <a:rPr sz="3000" b="1">
+                <a:solidFill>
+                  <a:srgbClr val="FFFFFF"/>
+                </a:solidFill>
+              </a:rPr>
+              <a:t>11</a:t>
+            </a:r>
+          </a:p>
+        </p:txBody>
+      </p:sp>
+      <p:sp>
+        <p:nvSpPr>
+          <p:cNvPr id="5" name="TextBox 4"/>
           <p:cNvSpPr txBox="1"/>
           <p:nvPr/>
         </p:nvSpPr>
         <p:spPr>
           <a:xfrm>
-            <a:off x="502920" y="438912"/>
-            <a:ext cx="6949440" cy="868680"/>
+            <a:off x="1463040" y="438912"/>
+            <a:ext cx="7406640" cy="868680"/>
           </a:xfrm>
           <a:prstGeom prst="rect">
             <a:avLst/>
@@ -6391,14 +6600,14 @@
                   <a:srgbClr val="0B2A4A"/>
                 </a:solidFill>
               </a:rPr>
-              <a:t>Câu hỏi thường gặp</a:t>
-            </a:r>
-          </a:p>
-        </p:txBody>
-      </p:sp>
-      <p:sp>
-        <p:nvSpPr>
-          <p:cNvPr id="5" name="TextBox 4"/>
+              <a:t>Tham khảo giá TSBĐ lân cận</a:t>
+            </a:r>
+          </a:p>
+        </p:txBody>
+      </p:sp>
+      <p:sp>
+        <p:nvSpPr>
+          <p:cNvPr id="6" name="TextBox 5"/>
           <p:cNvSpPr txBox="1"/>
           <p:nvPr/>
         </p:nvSpPr>
@@ -6437,7 +6646,7 @@
                   <a:srgbClr val="28303C"/>
                 </a:solidFill>
               </a:rPr>
-              <a:t>Quên PIN? </a:t>
+              <a:t>Cách dùng: </a:t>
             </a:r>
             <a:r>
               <a:rPr sz="1500" b="0">
@@ -6445,7 +6654,7 @@
                   <a:srgbClr val="28303C"/>
                 </a:solidFill>
               </a:rPr>
-              <a:t>“Quên mã PIN?” + mã nhân viên → đặt PIN mới, không mất dữ liệu.</a:t>
+              <a:t>mở thẻ tài sản (đã có tọa độ) → nhấn “Tham khảo”.</a:t>
             </a:r>
           </a:p>
           <a:p>
@@ -6468,7 +6677,7 @@
                   <a:srgbClr val="28303C"/>
                 </a:solidFill>
               </a:rPr>
-              <a:t>Mất mạng? </a:t>
+              <a:t>Kết quả: </a:t>
             </a:r>
             <a:r>
               <a:rPr sz="1500" b="0">
@@ -6476,7 +6685,7 @@
                   <a:srgbClr val="28303C"/>
                 </a:solidFill>
               </a:rPr>
-              <a:t>App vẫn dùng bình thường; chỉ backup/bản đồ/thời tiết tạm dừng.</a:t>
+              <a:t>liệt kê tối đa 20 TSBĐ gần nhất — khoảng cách, định giá, diện tích, tên KH sở hữu.</a:t>
             </a:r>
           </a:p>
           <a:p>
@@ -6499,7 +6708,7 @@
                   <a:srgbClr val="28303C"/>
                 </a:solidFill>
               </a:rPr>
-              <a:t>Xóa app có mất dữ liệu? </a:t>
+              <a:t>Tức thời: </a:t>
             </a:r>
             <a:r>
               <a:rPr sz="1500" b="0">
@@ -6507,7 +6716,7 @@
                   <a:srgbClr val="28303C"/>
                 </a:solidFill>
               </a:rPr>
-              <a:t>Có, nếu chưa sao lưu — hãy bật auto-backup Drive.</a:t>
+              <a:t>xếp theo đường chim bay (haversine), không cần mạng.</a:t>
             </a:r>
           </a:p>
           <a:p>
@@ -6530,7 +6739,7 @@
                   <a:srgbClr val="28303C"/>
                 </a:solidFill>
               </a:rPr>
-              <a:t>Đổi điện thoại? </a:t>
+              <a:t>Nâng cấp nền: </a:t>
             </a:r>
             <a:r>
               <a:rPr sz="1500" b="0">
@@ -6538,45 +6747,14 @@
                   <a:srgbClr val="28303C"/>
                 </a:solidFill>
               </a:rPr>
-              <a:t>Khôi phục từ Drive / file .cpb / “Nhận từ user”; nhờ quản trị viên cấp quyền thiết bị mới.</a:t>
-            </a:r>
-          </a:p>
-          <a:p>
-            <a:pPr algn="l">
-              <a:spcAft>
-                <a:spcPts val="600"/>
-              </a:spcAft>
-            </a:pPr>
-            <a:r>
-              <a:rPr sz="1500" b="1">
-                <a:solidFill>
-                  <a:srgbClr val="005B9F"/>
-                </a:solidFill>
-              </a:rPr>
-              <a:t>▪ </a:t>
-            </a:r>
-            <a:r>
-              <a:rPr sz="1500" b="1">
-                <a:solidFill>
-                  <a:srgbClr val="28303C"/>
-                </a:solidFill>
-              </a:rPr>
-              <a:t>App báo tài khoản khóa? </a:t>
-            </a:r>
-            <a:r>
-              <a:rPr sz="1500" b="0">
-                <a:solidFill>
-                  <a:srgbClr val="28303C"/>
-                </a:solidFill>
-              </a:rPr>
-              <a:t>Key bị khóa hoặc sai thiết bị — liên hệ quản trị viên.</a:t>
+              <a:t>có mạng thì thay bằng quãng đường đường bộ thực tế (OSRM) và sắp xếp lại.</a:t>
             </a:r>
           </a:p>
         </p:txBody>
       </p:sp>
       <p:pic>
         <p:nvPicPr>
-          <p:cNvPr id="6" name="Picture 5" descr="06_customer_list.png"/>
+          <p:cNvPr id="7" name="Picture 6" descr="12_ref_price.png"/>
           <p:cNvPicPr>
             <a:picLocks noChangeAspect="1"/>
           </p:cNvPicPr>
@@ -6636,7 +6814,7 @@
             <a:avLst/>
           </a:prstGeom>
           <a:solidFill>
-            <a:srgbClr val="0B2A4A"/>
+            <a:srgbClr val="FFFFFF"/>
           </a:solidFill>
           <a:ln>
             <a:noFill/>
@@ -6673,14 +6851,14 @@
         </p:nvSpPr>
         <p:spPr>
           <a:xfrm>
-            <a:off x="0" y="2788920"/>
-            <a:ext cx="12191695" cy="54864"/>
+            <a:off x="0" y="0"/>
+            <a:ext cx="12191695" cy="128016"/>
           </a:xfrm>
           <a:prstGeom prst="rect">
             <a:avLst/>
           </a:prstGeom>
           <a:solidFill>
-            <a:srgbClr val="DA251D"/>
+            <a:srgbClr val="005B9F"/>
           </a:solidFill>
           <a:ln>
             <a:noFill/>
@@ -6711,14 +6889,104 @@
       </p:sp>
       <p:sp>
         <p:nvSpPr>
-          <p:cNvPr id="4" name="TextBox 3"/>
+          <p:cNvPr id="4" name="Rectangle 3"/>
+          <p:cNvSpPr/>
+          <p:nvPr/>
+        </p:nvSpPr>
+        <p:spPr>
+          <a:xfrm>
+            <a:off x="502920" y="457200"/>
+            <a:ext cx="777240" cy="777240"/>
+          </a:xfrm>
+          <a:prstGeom prst="rect">
+            <a:avLst/>
+          </a:prstGeom>
+          <a:solidFill>
+            <a:srgbClr val="005B9F"/>
+          </a:solidFill>
+          <a:ln>
+            <a:noFill/>
+          </a:ln>
+          <a:effectLst/>
+        </p:spPr>
+        <p:style>
+          <a:lnRef idx="1">
+            <a:schemeClr val="accent1"/>
+          </a:lnRef>
+          <a:fillRef idx="3">
+            <a:schemeClr val="accent1"/>
+          </a:fillRef>
+          <a:effectRef idx="2">
+            <a:schemeClr val="accent1"/>
+          </a:effectRef>
+          <a:fontRef idx="minor">
+            <a:schemeClr val="lt1"/>
+          </a:fontRef>
+        </p:style>
+        <p:txBody>
+          <a:bodyPr rtlCol="0" anchor="ctr" wrap="none"/>
+          <a:lstStyle/>
+          <a:p>
+            <a:pPr algn="ctr"/>
+            <a:r>
+              <a:rPr sz="3000" b="1">
+                <a:solidFill>
+                  <a:srgbClr val="FFFFFF"/>
+                </a:solidFill>
+              </a:rPr>
+              <a:t>12</a:t>
+            </a:r>
+          </a:p>
+        </p:txBody>
+      </p:sp>
+      <p:sp>
+        <p:nvSpPr>
+          <p:cNvPr id="5" name="TextBox 4"/>
           <p:cNvSpPr txBox="1"/>
           <p:nvPr/>
         </p:nvSpPr>
         <p:spPr>
           <a:xfrm>
-            <a:off x="914400" y="1554480"/>
-            <a:ext cx="10332720" cy="914400"/>
+            <a:off x="1463040" y="438912"/>
+            <a:ext cx="7406640" cy="868680"/>
+          </a:xfrm>
+          <a:prstGeom prst="rect">
+            <a:avLst/>
+          </a:prstGeom>
+          <a:noFill/>
+        </p:spPr>
+        <p:txBody>
+          <a:bodyPr wrap="square" anchor="ctr">
+            <a:spAutoFit/>
+          </a:bodyPr>
+          <a:lstStyle/>
+          <a:p>
+            <a:pPr algn="l">
+              <a:spcAft>
+                <a:spcPts val="600"/>
+              </a:spcAft>
+            </a:pPr>
+            <a:r>
+              <a:rPr sz="2700" b="1">
+                <a:solidFill>
+                  <a:srgbClr val="0B2A4A"/>
+                </a:solidFill>
+              </a:rPr>
+              <a:t>Bản đồ &amp; chỉ đường</a:t>
+            </a:r>
+          </a:p>
+        </p:txBody>
+      </p:sp>
+      <p:sp>
+        <p:nvSpPr>
+          <p:cNvPr id="6" name="TextBox 5"/>
+          <p:cNvSpPr txBox="1"/>
+          <p:nvPr/>
+        </p:nvSpPr>
+        <p:spPr>
+          <a:xfrm>
+            <a:off x="566928" y="1600200"/>
+            <a:ext cx="7406640" cy="4480560"/>
           </a:xfrm>
           <a:prstGeom prst="rect">
             <a:avLst/>
@@ -6731,56 +6999,26 @@
           </a:bodyPr>
           <a:lstStyle/>
           <a:p>
-            <a:pPr algn="ctr">
-              <a:spcAft>
-                <a:spcPts val="600"/>
-              </a:spcAft>
-            </a:pPr>
-            <a:r>
-              <a:rPr sz="3400" b="1">
-                <a:solidFill>
-                  <a:srgbClr val="FFFFFF"/>
-                </a:solidFill>
-              </a:rPr>
-              <a:t>Ghi nhớ 3 điều quan trọng</a:t>
-            </a:r>
-          </a:p>
-        </p:txBody>
-      </p:sp>
-      <p:sp>
-        <p:nvSpPr>
-          <p:cNvPr id="5" name="TextBox 4"/>
-          <p:cNvSpPr txBox="1"/>
-          <p:nvPr/>
-        </p:nvSpPr>
-        <p:spPr>
-          <a:xfrm>
-            <a:off x="2011680" y="3200400"/>
-            <a:ext cx="8229600" cy="2560320"/>
-          </a:xfrm>
-          <a:prstGeom prst="rect">
-            <a:avLst/>
-          </a:prstGeom>
-          <a:noFill/>
-        </p:spPr>
-        <p:txBody>
-          <a:bodyPr wrap="square" anchor="t">
-            <a:spAutoFit/>
-          </a:bodyPr>
-          <a:lstStyle/>
-          <a:p>
             <a:pPr algn="l">
               <a:spcAft>
                 <a:spcPts val="600"/>
               </a:spcAft>
             </a:pPr>
             <a:r>
-              <a:rPr sz="2000" b="1">
-                <a:solidFill>
-                  <a:srgbClr val="FFFFFF"/>
-                </a:solidFill>
-              </a:rPr>
-              <a:t>1. Bật tự động sao lưu Google Drive ngay sau khi cài đặt.</a:t>
+              <a:rPr sz="1500" b="1">
+                <a:solidFill>
+                  <a:srgbClr val="005B9F"/>
+                </a:solidFill>
+              </a:rPr>
+              <a:t>▪ </a:t>
+            </a:r>
+            <a:r>
+              <a:rPr sz="1500" b="0">
+                <a:solidFill>
+                  <a:srgbClr val="28303C"/>
+                </a:solidFill>
+              </a:rPr>
+              <a:t>Mở từ Thao tác nhanh → “Bản đồ”.</a:t>
             </a:r>
           </a:p>
           <a:p>
@@ -6790,12 +7028,28 @@
               </a:spcAft>
             </a:pPr>
             <a:r>
-              <a:rPr sz="2000" b="1">
-                <a:solidFill>
-                  <a:srgbClr val="FFFFFF"/>
-                </a:solidFill>
-              </a:rPr>
-              <a:t>2. Nhập chính xác mã nhân viên — chìa khóa duy nhất khi quên PIN.</a:t>
+              <a:rPr sz="1500" b="1">
+                <a:solidFill>
+                  <a:srgbClr val="005B9F"/>
+                </a:solidFill>
+              </a:rPr>
+              <a:t>▪ </a:t>
+            </a:r>
+            <a:r>
+              <a:rPr sz="1500" b="1">
+                <a:solidFill>
+                  <a:srgbClr val="28303C"/>
+                </a:solidFill>
+              </a:rPr>
+              <a:t>Đổi lớp bản đồ: </a:t>
+            </a:r>
+            <a:r>
+              <a:rPr sz="1500" b="0">
+                <a:solidFill>
+                  <a:srgbClr val="28303C"/>
+                </a:solidFill>
+              </a:rPr>
+              <a:t>“Bản đồ tối” hoặc “Vệ tinh” (góc phải trên).</a:t>
             </a:r>
           </a:p>
           <a:p>
@@ -6805,54 +7059,84 @@
               </a:spcAft>
             </a:pPr>
             <a:r>
-              <a:rPr sz="2000" b="1">
-                <a:solidFill>
-                  <a:srgbClr val="FFFFFF"/>
-                </a:solidFill>
-              </a:rPr>
-              <a:t>3. Không chia sẻ PIN, mã nhân viên và file backup cho bất kỳ ai.</a:t>
-            </a:r>
-          </a:p>
-        </p:txBody>
-      </p:sp>
-      <p:sp>
-        <p:nvSpPr>
-          <p:cNvPr id="6" name="TextBox 5"/>
-          <p:cNvSpPr txBox="1"/>
-          <p:nvPr/>
-        </p:nvSpPr>
-        <p:spPr>
-          <a:xfrm>
-            <a:off x="914400" y="5943600"/>
-            <a:ext cx="10332720" cy="548640"/>
-          </a:xfrm>
-          <a:prstGeom prst="rect">
-            <a:avLst/>
-          </a:prstGeom>
-          <a:noFill/>
-        </p:spPr>
-        <p:txBody>
-          <a:bodyPr wrap="square" anchor="t">
-            <a:spAutoFit/>
-          </a:bodyPr>
-          <a:lstStyle/>
-          <a:p>
-            <a:pPr algn="ctr">
-              <a:spcAft>
-                <a:spcPts val="600"/>
-              </a:spcAft>
-            </a:pPr>
-            <a:r>
-              <a:rPr sz="1300" b="0">
-                <a:solidFill>
-                  <a:srgbClr val="9FB8D0"/>
-                </a:solidFill>
-              </a:rPr>
-              <a:t>ClientPro — Tài liệu hướng dẫn sử dụng • 07/2026</a:t>
-            </a:r>
-          </a:p>
-        </p:txBody>
-      </p:sp>
+              <a:rPr sz="1500" b="1">
+                <a:solidFill>
+                  <a:srgbClr val="005B9F"/>
+                </a:solidFill>
+              </a:rPr>
+              <a:t>▪ </a:t>
+            </a:r>
+            <a:r>
+              <a:rPr sz="1500" b="1">
+                <a:solidFill>
+                  <a:srgbClr val="28303C"/>
+                </a:solidFill>
+              </a:rPr>
+              <a:t>Nút định vị: </a:t>
+            </a:r>
+            <a:r>
+              <a:rPr sz="1500" b="0">
+                <a:solidFill>
+                  <a:srgbClr val="28303C"/>
+                </a:solidFill>
+              </a:rPr>
+              <a:t>quay về vị trí hiện tại của bạn (góc phải dưới).</a:t>
+            </a:r>
+          </a:p>
+          <a:p>
+            <a:pPr algn="l">
+              <a:spcAft>
+                <a:spcPts val="600"/>
+              </a:spcAft>
+            </a:pPr>
+            <a:r>
+              <a:rPr sz="1500" b="1">
+                <a:solidFill>
+                  <a:srgbClr val="005B9F"/>
+                </a:solidFill>
+              </a:rPr>
+              <a:t>▪ </a:t>
+            </a:r>
+            <a:r>
+              <a:rPr sz="1500" b="0">
+                <a:solidFill>
+                  <a:srgbClr val="28303C"/>
+                </a:solidFill>
+              </a:rPr>
+              <a:t>Khách hàng/tài sản có tọa độ sẽ hiện marker — chạm để xem thông tin &amp; chỉ đường.</a:t>
+            </a:r>
+          </a:p>
+        </p:txBody>
+      </p:sp>
+      <p:pic>
+        <p:nvPicPr>
+          <p:cNvPr id="7" name="Picture 6" descr="09_map.png"/>
+          <p:cNvPicPr>
+            <a:picLocks noChangeAspect="1"/>
+          </p:cNvPicPr>
+          <p:nvPr/>
+        </p:nvPicPr>
+        <p:blipFill>
+          <a:blip r:embed="rId2"/>
+          <a:stretch>
+            <a:fillRect/>
+          </a:stretch>
+        </p:blipFill>
+        <p:spPr>
+          <a:xfrm>
+            <a:off x="8900072" y="411480"/>
+            <a:ext cx="2788703" cy="6035040"/>
+          </a:xfrm>
+          <a:prstGeom prst="rect">
+            <a:avLst/>
+          </a:prstGeom>
+          <a:ln w="12700">
+            <a:solidFill>
+              <a:srgbClr val="C9D6E4"/>
+            </a:solidFill>
+          </a:ln>
+        </p:spPr>
+      </p:pic>
     </p:spTree>
   </p:cSld>
   <p:clrMapOvr>
@@ -6968,7 +7252,7 @@
         <p:spPr>
           <a:xfrm>
             <a:off x="502920" y="438912"/>
-            <a:ext cx="6949440" cy="868680"/>
+            <a:ext cx="7406640" cy="868680"/>
           </a:xfrm>
           <a:prstGeom prst="rect">
             <a:avLst/>
@@ -7108,7 +7392,7 @@
                   <a:srgbClr val="28303C"/>
                 </a:solidFill>
               </a:rPr>
-              <a:t>11 bước thao tác từ kích hoạt lần đầu đến sao lưu dữ liệu, kèm ảnh minh họa.</a:t>
+              <a:t>15 bước thao tác từ kích hoạt lần đầu đến chụp ảnh, tài sản bảo đảm, tham khảo giá và chuyển backup — kèm ảnh minh họa.</a:t>
             </a:r>
           </a:p>
           <a:p>
@@ -7173,6 +7457,1773 @@
           </a:ln>
         </p:spPr>
       </p:pic>
+    </p:spTree>
+  </p:cSld>
+  <p:clrMapOvr>
+    <a:masterClrMapping/>
+  </p:clrMapOvr>
+</p:sld>
+</file>
+
+<file path=ppt/slides/slide20.xml><?xml version="1.0" encoding="utf-8"?>
+<p:sld xmlns:a="http://schemas.openxmlformats.org/drawingml/2006/main" xmlns:p="http://schemas.openxmlformats.org/presentationml/2006/main" xmlns:r="http://schemas.openxmlformats.org/officeDocument/2006/relationships">
+  <p:cSld>
+    <p:spTree>
+      <p:nvGrpSpPr>
+        <p:cNvPr id="1" name=""/>
+        <p:cNvGrpSpPr/>
+        <p:nvPr/>
+      </p:nvGrpSpPr>
+      <p:grpSpPr/>
+      <p:sp>
+        <p:nvSpPr>
+          <p:cNvPr id="2" name="Rectangle 1"/>
+          <p:cNvSpPr/>
+          <p:nvPr/>
+        </p:nvSpPr>
+        <p:spPr>
+          <a:xfrm>
+            <a:off x="0" y="0"/>
+            <a:ext cx="12191695" cy="6858000"/>
+          </a:xfrm>
+          <a:prstGeom prst="rect">
+            <a:avLst/>
+          </a:prstGeom>
+          <a:solidFill>
+            <a:srgbClr val="FFFFFF"/>
+          </a:solidFill>
+          <a:ln>
+            <a:noFill/>
+          </a:ln>
+          <a:effectLst/>
+        </p:spPr>
+        <p:style>
+          <a:lnRef idx="1">
+            <a:schemeClr val="accent1"/>
+          </a:lnRef>
+          <a:fillRef idx="3">
+            <a:schemeClr val="accent1"/>
+          </a:fillRef>
+          <a:effectRef idx="2">
+            <a:schemeClr val="accent1"/>
+          </a:effectRef>
+          <a:fontRef idx="minor">
+            <a:schemeClr val="lt1"/>
+          </a:fontRef>
+        </p:style>
+        <p:txBody>
+          <a:bodyPr rtlCol="0" anchor="ctr"/>
+          <a:lstStyle/>
+          <a:p>
+            <a:pPr algn="ctr"/>
+          </a:p>
+        </p:txBody>
+      </p:sp>
+      <p:sp>
+        <p:nvSpPr>
+          <p:cNvPr id="3" name="Rectangle 2"/>
+          <p:cNvSpPr/>
+          <p:nvPr/>
+        </p:nvSpPr>
+        <p:spPr>
+          <a:xfrm>
+            <a:off x="0" y="0"/>
+            <a:ext cx="12191695" cy="128016"/>
+          </a:xfrm>
+          <a:prstGeom prst="rect">
+            <a:avLst/>
+          </a:prstGeom>
+          <a:solidFill>
+            <a:srgbClr val="005B9F"/>
+          </a:solidFill>
+          <a:ln>
+            <a:noFill/>
+          </a:ln>
+          <a:effectLst/>
+        </p:spPr>
+        <p:style>
+          <a:lnRef idx="1">
+            <a:schemeClr val="accent1"/>
+          </a:lnRef>
+          <a:fillRef idx="3">
+            <a:schemeClr val="accent1"/>
+          </a:fillRef>
+          <a:effectRef idx="2">
+            <a:schemeClr val="accent1"/>
+          </a:effectRef>
+          <a:fontRef idx="minor">
+            <a:schemeClr val="lt1"/>
+          </a:fontRef>
+        </p:style>
+        <p:txBody>
+          <a:bodyPr rtlCol="0" anchor="ctr"/>
+          <a:lstStyle/>
+          <a:p>
+            <a:pPr algn="ctr"/>
+          </a:p>
+        </p:txBody>
+      </p:sp>
+      <p:sp>
+        <p:nvSpPr>
+          <p:cNvPr id="4" name="Rectangle 3"/>
+          <p:cNvSpPr/>
+          <p:nvPr/>
+        </p:nvSpPr>
+        <p:spPr>
+          <a:xfrm>
+            <a:off x="502920" y="457200"/>
+            <a:ext cx="777240" cy="777240"/>
+          </a:xfrm>
+          <a:prstGeom prst="rect">
+            <a:avLst/>
+          </a:prstGeom>
+          <a:solidFill>
+            <a:srgbClr val="005B9F"/>
+          </a:solidFill>
+          <a:ln>
+            <a:noFill/>
+          </a:ln>
+          <a:effectLst/>
+        </p:spPr>
+        <p:style>
+          <a:lnRef idx="1">
+            <a:schemeClr val="accent1"/>
+          </a:lnRef>
+          <a:fillRef idx="3">
+            <a:schemeClr val="accent1"/>
+          </a:fillRef>
+          <a:effectRef idx="2">
+            <a:schemeClr val="accent1"/>
+          </a:effectRef>
+          <a:fontRef idx="minor">
+            <a:schemeClr val="lt1"/>
+          </a:fontRef>
+        </p:style>
+        <p:txBody>
+          <a:bodyPr rtlCol="0" anchor="ctr" wrap="none"/>
+          <a:lstStyle/>
+          <a:p>
+            <a:pPr algn="ctr"/>
+            <a:r>
+              <a:rPr sz="3000" b="1">
+                <a:solidFill>
+                  <a:srgbClr val="FFFFFF"/>
+                </a:solidFill>
+              </a:rPr>
+              <a:t>13</a:t>
+            </a:r>
+          </a:p>
+        </p:txBody>
+      </p:sp>
+      <p:sp>
+        <p:nvSpPr>
+          <p:cNvPr id="5" name="TextBox 4"/>
+          <p:cNvSpPr txBox="1"/>
+          <p:nvPr/>
+        </p:nvSpPr>
+        <p:spPr>
+          <a:xfrm>
+            <a:off x="1463040" y="438912"/>
+            <a:ext cx="7406640" cy="868680"/>
+          </a:xfrm>
+          <a:prstGeom prst="rect">
+            <a:avLst/>
+          </a:prstGeom>
+          <a:noFill/>
+        </p:spPr>
+        <p:txBody>
+          <a:bodyPr wrap="square" anchor="ctr">
+            <a:spAutoFit/>
+          </a:bodyPr>
+          <a:lstStyle/>
+          <a:p>
+            <a:pPr algn="l">
+              <a:spcAft>
+                <a:spcPts val="600"/>
+              </a:spcAft>
+            </a:pPr>
+            <a:r>
+              <a:rPr sz="2700" b="1">
+                <a:solidFill>
+                  <a:srgbClr val="0B2A4A"/>
+                </a:solidFill>
+              </a:rPr>
+              <a:t>Menu cài đặt &amp; giao diện</a:t>
+            </a:r>
+          </a:p>
+        </p:txBody>
+      </p:sp>
+      <p:sp>
+        <p:nvSpPr>
+          <p:cNvPr id="6" name="TextBox 5"/>
+          <p:cNvSpPr txBox="1"/>
+          <p:nvPr/>
+        </p:nvSpPr>
+        <p:spPr>
+          <a:xfrm>
+            <a:off x="566928" y="1600200"/>
+            <a:ext cx="7406640" cy="4480560"/>
+          </a:xfrm>
+          <a:prstGeom prst="rect">
+            <a:avLst/>
+          </a:prstGeom>
+          <a:noFill/>
+        </p:spPr>
+        <p:txBody>
+          <a:bodyPr wrap="square" anchor="t">
+            <a:spAutoFit/>
+          </a:bodyPr>
+          <a:lstStyle/>
+          <a:p>
+            <a:pPr algn="l">
+              <a:spcAft>
+                <a:spcPts val="600"/>
+              </a:spcAft>
+            </a:pPr>
+            <a:r>
+              <a:rPr sz="1500" b="1">
+                <a:solidFill>
+                  <a:srgbClr val="005B9F"/>
+                </a:solidFill>
+              </a:rPr>
+              <a:t>▪ </a:t>
+            </a:r>
+            <a:r>
+              <a:rPr sz="1500" b="0">
+                <a:solidFill>
+                  <a:srgbClr val="28303C"/>
+                </a:solidFill>
+              </a:rPr>
+              <a:t>Mở bằng nút bánh răng góc phải màn hình chính.</a:t>
+            </a:r>
+          </a:p>
+          <a:p>
+            <a:pPr algn="l">
+              <a:spcAft>
+                <a:spcPts val="600"/>
+              </a:spcAft>
+            </a:pPr>
+            <a:r>
+              <a:rPr sz="1500" b="1">
+                <a:solidFill>
+                  <a:srgbClr val="005B9F"/>
+                </a:solidFill>
+              </a:rPr>
+              <a:t>▪ </a:t>
+            </a:r>
+            <a:r>
+              <a:rPr sz="1500" b="1">
+                <a:solidFill>
+                  <a:srgbClr val="28303C"/>
+                </a:solidFill>
+              </a:rPr>
+              <a:t>Giao diện: </a:t>
+            </a:r>
+            <a:r>
+              <a:rPr sz="1500" b="0">
+                <a:solidFill>
+                  <a:srgbClr val="28303C"/>
+                </a:solidFill>
+              </a:rPr>
+              <a:t>nhiều bộ màu (xanh ngân hàng, tối, hoàng hôn, đại dương…), đổi ngay và được ghi nhớ.</a:t>
+            </a:r>
+          </a:p>
+          <a:p>
+            <a:pPr algn="l">
+              <a:spcAft>
+                <a:spcPts val="600"/>
+              </a:spcAft>
+            </a:pPr>
+            <a:r>
+              <a:rPr sz="1500" b="1">
+                <a:solidFill>
+                  <a:srgbClr val="005B9F"/>
+                </a:solidFill>
+              </a:rPr>
+              <a:t>▪ </a:t>
+            </a:r>
+            <a:r>
+              <a:rPr sz="1500" b="1">
+                <a:solidFill>
+                  <a:srgbClr val="28303C"/>
+                </a:solidFill>
+              </a:rPr>
+              <a:t>Bảo mật: </a:t>
+            </a:r>
+            <a:r>
+              <a:rPr sz="1500" b="0">
+                <a:solidFill>
+                  <a:srgbClr val="28303C"/>
+                </a:solidFill>
+              </a:rPr>
+              <a:t>bật Face ID / vân tay, đổi mã PIN.</a:t>
+            </a:r>
+          </a:p>
+          <a:p>
+            <a:pPr algn="l">
+              <a:spcAft>
+                <a:spcPts val="600"/>
+              </a:spcAft>
+            </a:pPr>
+            <a:r>
+              <a:rPr sz="1500" b="1">
+                <a:solidFill>
+                  <a:srgbClr val="005B9F"/>
+                </a:solidFill>
+              </a:rPr>
+              <a:t>▪ </a:t>
+            </a:r>
+            <a:r>
+              <a:rPr sz="1500" b="1">
+                <a:solidFill>
+                  <a:srgbClr val="28303C"/>
+                </a:solidFill>
+              </a:rPr>
+              <a:t>Donate: </a:t>
+            </a:r>
+            <a:r>
+              <a:rPr sz="1500" b="0">
+                <a:solidFill>
+                  <a:srgbClr val="28303C"/>
+                </a:solidFill>
+              </a:rPr>
+              <a:t>ủng hộ tác giả ứng dụng.</a:t>
+            </a:r>
+          </a:p>
+        </p:txBody>
+      </p:sp>
+      <p:pic>
+        <p:nvPicPr>
+          <p:cNvPr id="7" name="Picture 6" descr="10_menu.png"/>
+          <p:cNvPicPr>
+            <a:picLocks noChangeAspect="1"/>
+          </p:cNvPicPr>
+          <p:nvPr/>
+        </p:nvPicPr>
+        <p:blipFill>
+          <a:blip r:embed="rId2"/>
+          <a:stretch>
+            <a:fillRect/>
+          </a:stretch>
+        </p:blipFill>
+        <p:spPr>
+          <a:xfrm>
+            <a:off x="8900072" y="411480"/>
+            <a:ext cx="2788703" cy="6035040"/>
+          </a:xfrm>
+          <a:prstGeom prst="rect">
+            <a:avLst/>
+          </a:prstGeom>
+          <a:ln w="12700">
+            <a:solidFill>
+              <a:srgbClr val="C9D6E4"/>
+            </a:solidFill>
+          </a:ln>
+        </p:spPr>
+      </p:pic>
+    </p:spTree>
+  </p:cSld>
+  <p:clrMapOvr>
+    <a:masterClrMapping/>
+  </p:clrMapOvr>
+</p:sld>
+</file>
+
+<file path=ppt/slides/slide21.xml><?xml version="1.0" encoding="utf-8"?>
+<p:sld xmlns:a="http://schemas.openxmlformats.org/drawingml/2006/main" xmlns:p="http://schemas.openxmlformats.org/presentationml/2006/main" xmlns:r="http://schemas.openxmlformats.org/officeDocument/2006/relationships">
+  <p:cSld>
+    <p:spTree>
+      <p:nvGrpSpPr>
+        <p:cNvPr id="1" name=""/>
+        <p:cNvGrpSpPr/>
+        <p:nvPr/>
+      </p:nvGrpSpPr>
+      <p:grpSpPr/>
+      <p:sp>
+        <p:nvSpPr>
+          <p:cNvPr id="2" name="Rectangle 1"/>
+          <p:cNvSpPr/>
+          <p:nvPr/>
+        </p:nvSpPr>
+        <p:spPr>
+          <a:xfrm>
+            <a:off x="0" y="0"/>
+            <a:ext cx="12191695" cy="6858000"/>
+          </a:xfrm>
+          <a:prstGeom prst="rect">
+            <a:avLst/>
+          </a:prstGeom>
+          <a:solidFill>
+            <a:srgbClr val="FFFFFF"/>
+          </a:solidFill>
+          <a:ln>
+            <a:noFill/>
+          </a:ln>
+          <a:effectLst/>
+        </p:spPr>
+        <p:style>
+          <a:lnRef idx="1">
+            <a:schemeClr val="accent1"/>
+          </a:lnRef>
+          <a:fillRef idx="3">
+            <a:schemeClr val="accent1"/>
+          </a:fillRef>
+          <a:effectRef idx="2">
+            <a:schemeClr val="accent1"/>
+          </a:effectRef>
+          <a:fontRef idx="minor">
+            <a:schemeClr val="lt1"/>
+          </a:fontRef>
+        </p:style>
+        <p:txBody>
+          <a:bodyPr rtlCol="0" anchor="ctr"/>
+          <a:lstStyle/>
+          <a:p>
+            <a:pPr algn="ctr"/>
+          </a:p>
+        </p:txBody>
+      </p:sp>
+      <p:sp>
+        <p:nvSpPr>
+          <p:cNvPr id="3" name="Rectangle 2"/>
+          <p:cNvSpPr/>
+          <p:nvPr/>
+        </p:nvSpPr>
+        <p:spPr>
+          <a:xfrm>
+            <a:off x="0" y="0"/>
+            <a:ext cx="12191695" cy="128016"/>
+          </a:xfrm>
+          <a:prstGeom prst="rect">
+            <a:avLst/>
+          </a:prstGeom>
+          <a:solidFill>
+            <a:srgbClr val="005B9F"/>
+          </a:solidFill>
+          <a:ln>
+            <a:noFill/>
+          </a:ln>
+          <a:effectLst/>
+        </p:spPr>
+        <p:style>
+          <a:lnRef idx="1">
+            <a:schemeClr val="accent1"/>
+          </a:lnRef>
+          <a:fillRef idx="3">
+            <a:schemeClr val="accent1"/>
+          </a:fillRef>
+          <a:effectRef idx="2">
+            <a:schemeClr val="accent1"/>
+          </a:effectRef>
+          <a:fontRef idx="minor">
+            <a:schemeClr val="lt1"/>
+          </a:fontRef>
+        </p:style>
+        <p:txBody>
+          <a:bodyPr rtlCol="0" anchor="ctr"/>
+          <a:lstStyle/>
+          <a:p>
+            <a:pPr algn="ctr"/>
+          </a:p>
+        </p:txBody>
+      </p:sp>
+      <p:sp>
+        <p:nvSpPr>
+          <p:cNvPr id="4" name="Rectangle 3"/>
+          <p:cNvSpPr/>
+          <p:nvPr/>
+        </p:nvSpPr>
+        <p:spPr>
+          <a:xfrm>
+            <a:off x="502920" y="457200"/>
+            <a:ext cx="777240" cy="777240"/>
+          </a:xfrm>
+          <a:prstGeom prst="rect">
+            <a:avLst/>
+          </a:prstGeom>
+          <a:solidFill>
+            <a:srgbClr val="005B9F"/>
+          </a:solidFill>
+          <a:ln>
+            <a:noFill/>
+          </a:ln>
+          <a:effectLst/>
+        </p:spPr>
+        <p:style>
+          <a:lnRef idx="1">
+            <a:schemeClr val="accent1"/>
+          </a:lnRef>
+          <a:fillRef idx="3">
+            <a:schemeClr val="accent1"/>
+          </a:fillRef>
+          <a:effectRef idx="2">
+            <a:schemeClr val="accent1"/>
+          </a:effectRef>
+          <a:fontRef idx="minor">
+            <a:schemeClr val="lt1"/>
+          </a:fontRef>
+        </p:style>
+        <p:txBody>
+          <a:bodyPr rtlCol="0" anchor="ctr" wrap="none"/>
+          <a:lstStyle/>
+          <a:p>
+            <a:pPr algn="ctr"/>
+            <a:r>
+              <a:rPr sz="3000" b="1">
+                <a:solidFill>
+                  <a:srgbClr val="FFFFFF"/>
+                </a:solidFill>
+              </a:rPr>
+              <a:t>14</a:t>
+            </a:r>
+          </a:p>
+        </p:txBody>
+      </p:sp>
+      <p:sp>
+        <p:nvSpPr>
+          <p:cNvPr id="5" name="TextBox 4"/>
+          <p:cNvSpPr txBox="1"/>
+          <p:nvPr/>
+        </p:nvSpPr>
+        <p:spPr>
+          <a:xfrm>
+            <a:off x="1463040" y="438912"/>
+            <a:ext cx="4846320" cy="868680"/>
+          </a:xfrm>
+          <a:prstGeom prst="rect">
+            <a:avLst/>
+          </a:prstGeom>
+          <a:noFill/>
+        </p:spPr>
+        <p:txBody>
+          <a:bodyPr wrap="square" anchor="ctr">
+            <a:spAutoFit/>
+          </a:bodyPr>
+          <a:lstStyle/>
+          <a:p>
+            <a:pPr algn="l">
+              <a:spcAft>
+                <a:spcPts val="600"/>
+              </a:spcAft>
+            </a:pPr>
+            <a:r>
+              <a:rPr sz="2200" b="1">
+                <a:solidFill>
+                  <a:srgbClr val="0B2A4A"/>
+                </a:solidFill>
+              </a:rPr>
+              <a:t>Sao lưu &amp; khôi phục</a:t>
+            </a:r>
+          </a:p>
+        </p:txBody>
+      </p:sp>
+      <p:sp>
+        <p:nvSpPr>
+          <p:cNvPr id="6" name="TextBox 5"/>
+          <p:cNvSpPr txBox="1"/>
+          <p:nvPr/>
+        </p:nvSpPr>
+        <p:spPr>
+          <a:xfrm>
+            <a:off x="566928" y="1600200"/>
+            <a:ext cx="5394960" cy="4480560"/>
+          </a:xfrm>
+          <a:prstGeom prst="rect">
+            <a:avLst/>
+          </a:prstGeom>
+          <a:noFill/>
+        </p:spPr>
+        <p:txBody>
+          <a:bodyPr wrap="square" anchor="t">
+            <a:spAutoFit/>
+          </a:bodyPr>
+          <a:lstStyle/>
+          <a:p>
+            <a:pPr algn="l">
+              <a:spcAft>
+                <a:spcPts val="600"/>
+              </a:spcAft>
+            </a:pPr>
+            <a:r>
+              <a:rPr sz="1500" b="1">
+                <a:solidFill>
+                  <a:srgbClr val="005B9F"/>
+                </a:solidFill>
+              </a:rPr>
+              <a:t>▪ </a:t>
+            </a:r>
+            <a:r>
+              <a:rPr sz="1500" b="1">
+                <a:solidFill>
+                  <a:srgbClr val="28303C"/>
+                </a:solidFill>
+              </a:rPr>
+              <a:t>Mã hóa: </a:t>
+            </a:r>
+            <a:r>
+              <a:rPr sz="1500" b="0">
+                <a:solidFill>
+                  <a:srgbClr val="28303C"/>
+                </a:solidFill>
+              </a:rPr>
+              <a:t>mọi bản backup mã hóa AES-GCM bằng khóa KDATA cấp riêng cho từng nhân viên.</a:t>
+            </a:r>
+          </a:p>
+          <a:p>
+            <a:pPr algn="l">
+              <a:spcAft>
+                <a:spcPts val="600"/>
+              </a:spcAft>
+            </a:pPr>
+            <a:r>
+              <a:rPr sz="1500" b="1">
+                <a:solidFill>
+                  <a:srgbClr val="005B9F"/>
+                </a:solidFill>
+              </a:rPr>
+              <a:t>▪ </a:t>
+            </a:r>
+            <a:r>
+              <a:rPr sz="1500" b="1">
+                <a:solidFill>
+                  <a:srgbClr val="28303C"/>
+                </a:solidFill>
+              </a:rPr>
+              <a:t>Lên Drive: </a:t>
+            </a:r>
+            <a:r>
+              <a:rPr sz="1500" b="0">
+                <a:solidFill>
+                  <a:srgbClr val="28303C"/>
+                </a:solidFill>
+              </a:rPr>
+              <a:t>“Sao lưu lên Drive” (cần cấu hình Link GAS + token); app tự backup hằng ngày, giữ 3 bản.</a:t>
+            </a:r>
+          </a:p>
+          <a:p>
+            <a:pPr algn="l">
+              <a:spcAft>
+                <a:spcPts val="600"/>
+              </a:spcAft>
+            </a:pPr>
+            <a:r>
+              <a:rPr sz="1500" b="1">
+                <a:solidFill>
+                  <a:srgbClr val="005B9F"/>
+                </a:solidFill>
+              </a:rPr>
+              <a:t>▪ </a:t>
+            </a:r>
+            <a:r>
+              <a:rPr sz="1500" b="1">
+                <a:solidFill>
+                  <a:srgbClr val="28303C"/>
+                </a:solidFill>
+              </a:rPr>
+              <a:t>Trong máy: </a:t>
+            </a:r>
+            <a:r>
+              <a:rPr sz="1500" b="0">
+                <a:solidFill>
+                  <a:srgbClr val="28303C"/>
+                </a:solidFill>
+              </a:rPr>
+              <a:t>“Tạo &amp; xuất file” ra .cpb; mỗi bản có nút Restore / Xuất file / Gửi / Xóa.</a:t>
+            </a:r>
+          </a:p>
+          <a:p>
+            <a:pPr algn="l">
+              <a:spcAft>
+                <a:spcPts val="600"/>
+              </a:spcAft>
+            </a:pPr>
+            <a:r>
+              <a:rPr sz="1500" b="1">
+                <a:solidFill>
+                  <a:srgbClr val="005B9F"/>
+                </a:solidFill>
+              </a:rPr>
+              <a:t>▪ </a:t>
+            </a:r>
+            <a:r>
+              <a:rPr sz="1500" b="1">
+                <a:solidFill>
+                  <a:srgbClr val="28303C"/>
+                </a:solidFill>
+              </a:rPr>
+              <a:t>Khôi phục: </a:t>
+            </a:r>
+            <a:r>
+              <a:rPr sz="1500" b="0">
+                <a:solidFill>
+                  <a:srgbClr val="28303C"/>
+                </a:solidFill>
+              </a:rPr>
+              <a:t>“Nhập file .cpb”; app luôn hỏi xác nhận trước khi ghi đè.</a:t>
+            </a:r>
+          </a:p>
+        </p:txBody>
+      </p:sp>
+      <p:pic>
+        <p:nvPicPr>
+          <p:cNvPr id="7" name="Picture 6" descr="16_backup_list.png"/>
+          <p:cNvPicPr>
+            <a:picLocks noChangeAspect="1"/>
+          </p:cNvPicPr>
+          <p:nvPr/>
+        </p:nvPicPr>
+        <p:blipFill>
+          <a:blip r:embed="rId2"/>
+          <a:stretch>
+            <a:fillRect/>
+          </a:stretch>
+        </p:blipFill>
+        <p:spPr>
+          <a:xfrm>
+            <a:off x="9245031" y="685800"/>
+            <a:ext cx="2535185" cy="5486400"/>
+          </a:xfrm>
+          <a:prstGeom prst="rect">
+            <a:avLst/>
+          </a:prstGeom>
+          <a:ln w="12700">
+            <a:solidFill>
+              <a:srgbClr val="C9D6E4"/>
+            </a:solidFill>
+          </a:ln>
+        </p:spPr>
+      </p:pic>
+      <p:pic>
+        <p:nvPicPr>
+          <p:cNvPr id="8" name="Picture 7" descr="11_backup_manager.png"/>
+          <p:cNvPicPr>
+            <a:picLocks noChangeAspect="1"/>
+          </p:cNvPicPr>
+          <p:nvPr/>
+        </p:nvPicPr>
+        <p:blipFill>
+          <a:blip r:embed="rId3"/>
+          <a:stretch>
+            <a:fillRect/>
+          </a:stretch>
+        </p:blipFill>
+        <p:spPr>
+          <a:xfrm>
+            <a:off x="6508679" y="685800"/>
+            <a:ext cx="2535185" cy="5486400"/>
+          </a:xfrm>
+          <a:prstGeom prst="rect">
+            <a:avLst/>
+          </a:prstGeom>
+          <a:ln w="12700">
+            <a:solidFill>
+              <a:srgbClr val="C9D6E4"/>
+            </a:solidFill>
+          </a:ln>
+        </p:spPr>
+      </p:pic>
+    </p:spTree>
+  </p:cSld>
+  <p:clrMapOvr>
+    <a:masterClrMapping/>
+  </p:clrMapOvr>
+</p:sld>
+</file>
+
+<file path=ppt/slides/slide22.xml><?xml version="1.0" encoding="utf-8"?>
+<p:sld xmlns:a="http://schemas.openxmlformats.org/drawingml/2006/main" xmlns:p="http://schemas.openxmlformats.org/presentationml/2006/main" xmlns:r="http://schemas.openxmlformats.org/officeDocument/2006/relationships">
+  <p:cSld>
+    <p:spTree>
+      <p:nvGrpSpPr>
+        <p:cNvPr id="1" name=""/>
+        <p:cNvGrpSpPr/>
+        <p:nvPr/>
+      </p:nvGrpSpPr>
+      <p:grpSpPr/>
+      <p:sp>
+        <p:nvSpPr>
+          <p:cNvPr id="2" name="Rectangle 1"/>
+          <p:cNvSpPr/>
+          <p:nvPr/>
+        </p:nvSpPr>
+        <p:spPr>
+          <a:xfrm>
+            <a:off x="0" y="0"/>
+            <a:ext cx="12191695" cy="6858000"/>
+          </a:xfrm>
+          <a:prstGeom prst="rect">
+            <a:avLst/>
+          </a:prstGeom>
+          <a:solidFill>
+            <a:srgbClr val="FFFFFF"/>
+          </a:solidFill>
+          <a:ln>
+            <a:noFill/>
+          </a:ln>
+          <a:effectLst/>
+        </p:spPr>
+        <p:style>
+          <a:lnRef idx="1">
+            <a:schemeClr val="accent1"/>
+          </a:lnRef>
+          <a:fillRef idx="3">
+            <a:schemeClr val="accent1"/>
+          </a:fillRef>
+          <a:effectRef idx="2">
+            <a:schemeClr val="accent1"/>
+          </a:effectRef>
+          <a:fontRef idx="minor">
+            <a:schemeClr val="lt1"/>
+          </a:fontRef>
+        </p:style>
+        <p:txBody>
+          <a:bodyPr rtlCol="0" anchor="ctr"/>
+          <a:lstStyle/>
+          <a:p>
+            <a:pPr algn="ctr"/>
+          </a:p>
+        </p:txBody>
+      </p:sp>
+      <p:sp>
+        <p:nvSpPr>
+          <p:cNvPr id="3" name="Rectangle 2"/>
+          <p:cNvSpPr/>
+          <p:nvPr/>
+        </p:nvSpPr>
+        <p:spPr>
+          <a:xfrm>
+            <a:off x="0" y="0"/>
+            <a:ext cx="12191695" cy="128016"/>
+          </a:xfrm>
+          <a:prstGeom prst="rect">
+            <a:avLst/>
+          </a:prstGeom>
+          <a:solidFill>
+            <a:srgbClr val="005B9F"/>
+          </a:solidFill>
+          <a:ln>
+            <a:noFill/>
+          </a:ln>
+          <a:effectLst/>
+        </p:spPr>
+        <p:style>
+          <a:lnRef idx="1">
+            <a:schemeClr val="accent1"/>
+          </a:lnRef>
+          <a:fillRef idx="3">
+            <a:schemeClr val="accent1"/>
+          </a:fillRef>
+          <a:effectRef idx="2">
+            <a:schemeClr val="accent1"/>
+          </a:effectRef>
+          <a:fontRef idx="minor">
+            <a:schemeClr val="lt1"/>
+          </a:fontRef>
+        </p:style>
+        <p:txBody>
+          <a:bodyPr rtlCol="0" anchor="ctr"/>
+          <a:lstStyle/>
+          <a:p>
+            <a:pPr algn="ctr"/>
+          </a:p>
+        </p:txBody>
+      </p:sp>
+      <p:sp>
+        <p:nvSpPr>
+          <p:cNvPr id="4" name="Rectangle 3"/>
+          <p:cNvSpPr/>
+          <p:nvPr/>
+        </p:nvSpPr>
+        <p:spPr>
+          <a:xfrm>
+            <a:off x="502920" y="457200"/>
+            <a:ext cx="777240" cy="777240"/>
+          </a:xfrm>
+          <a:prstGeom prst="rect">
+            <a:avLst/>
+          </a:prstGeom>
+          <a:solidFill>
+            <a:srgbClr val="005B9F"/>
+          </a:solidFill>
+          <a:ln>
+            <a:noFill/>
+          </a:ln>
+          <a:effectLst/>
+        </p:spPr>
+        <p:style>
+          <a:lnRef idx="1">
+            <a:schemeClr val="accent1"/>
+          </a:lnRef>
+          <a:fillRef idx="3">
+            <a:schemeClr val="accent1"/>
+          </a:fillRef>
+          <a:effectRef idx="2">
+            <a:schemeClr val="accent1"/>
+          </a:effectRef>
+          <a:fontRef idx="minor">
+            <a:schemeClr val="lt1"/>
+          </a:fontRef>
+        </p:style>
+        <p:txBody>
+          <a:bodyPr rtlCol="0" anchor="ctr" wrap="none"/>
+          <a:lstStyle/>
+          <a:p>
+            <a:pPr algn="ctr"/>
+            <a:r>
+              <a:rPr sz="3000" b="1">
+                <a:solidFill>
+                  <a:srgbClr val="FFFFFF"/>
+                </a:solidFill>
+              </a:rPr>
+              <a:t>15</a:t>
+            </a:r>
+          </a:p>
+        </p:txBody>
+      </p:sp>
+      <p:sp>
+        <p:nvSpPr>
+          <p:cNvPr id="5" name="TextBox 4"/>
+          <p:cNvSpPr txBox="1"/>
+          <p:nvPr/>
+        </p:nvSpPr>
+        <p:spPr>
+          <a:xfrm>
+            <a:off x="1463040" y="438912"/>
+            <a:ext cx="4846320" cy="868680"/>
+          </a:xfrm>
+          <a:prstGeom prst="rect">
+            <a:avLst/>
+          </a:prstGeom>
+          <a:noFill/>
+        </p:spPr>
+        <p:txBody>
+          <a:bodyPr wrap="square" anchor="ctr">
+            <a:spAutoFit/>
+          </a:bodyPr>
+          <a:lstStyle/>
+          <a:p>
+            <a:pPr algn="l">
+              <a:spcAft>
+                <a:spcPts val="600"/>
+              </a:spcAft>
+            </a:pPr>
+            <a:r>
+              <a:rPr sz="2200" b="1">
+                <a:solidFill>
+                  <a:srgbClr val="0B2A4A"/>
+                </a:solidFill>
+              </a:rPr>
+              <a:t>Chuyển bản backup cho user khác</a:t>
+            </a:r>
+          </a:p>
+        </p:txBody>
+      </p:sp>
+      <p:sp>
+        <p:nvSpPr>
+          <p:cNvPr id="6" name="TextBox 5"/>
+          <p:cNvSpPr txBox="1"/>
+          <p:nvPr/>
+        </p:nvSpPr>
+        <p:spPr>
+          <a:xfrm>
+            <a:off x="566928" y="1600200"/>
+            <a:ext cx="5394960" cy="4480560"/>
+          </a:xfrm>
+          <a:prstGeom prst="rect">
+            <a:avLst/>
+          </a:prstGeom>
+          <a:noFill/>
+        </p:spPr>
+        <p:txBody>
+          <a:bodyPr wrap="square" anchor="t">
+            <a:spAutoFit/>
+          </a:bodyPr>
+          <a:lstStyle/>
+          <a:p>
+            <a:pPr algn="l">
+              <a:spcAft>
+                <a:spcPts val="600"/>
+              </a:spcAft>
+            </a:pPr>
+            <a:r>
+              <a:rPr sz="1500" b="1">
+                <a:solidFill>
+                  <a:srgbClr val="005B9F"/>
+                </a:solidFill>
+              </a:rPr>
+              <a:t>▪ </a:t>
+            </a:r>
+            <a:r>
+              <a:rPr sz="1500" b="1">
+                <a:solidFill>
+                  <a:srgbClr val="28303C"/>
+                </a:solidFill>
+              </a:rPr>
+              <a:t>Bên gửi: </a:t>
+            </a:r>
+            <a:r>
+              <a:rPr sz="1500" b="0">
+                <a:solidFill>
+                  <a:srgbClr val="28303C"/>
+                </a:solidFill>
+              </a:rPr>
+              <a:t>danh sách bản sao lưu → “Gửi” → chọn cán bộ nhận (theo tên/mã) → xác nhận.</a:t>
+            </a:r>
+          </a:p>
+          <a:p>
+            <a:pPr algn="l">
+              <a:spcAft>
+                <a:spcPts val="600"/>
+              </a:spcAft>
+            </a:pPr>
+            <a:r>
+              <a:rPr sz="1500" b="1">
+                <a:solidFill>
+                  <a:srgbClr val="005B9F"/>
+                </a:solidFill>
+              </a:rPr>
+              <a:t>▪ </a:t>
+            </a:r>
+            <a:r>
+              <a:rPr sz="1500" b="1">
+                <a:solidFill>
+                  <a:srgbClr val="28303C"/>
+                </a:solidFill>
+              </a:rPr>
+              <a:t>Bên nhận: </a:t>
+            </a:r>
+            <a:r>
+              <a:rPr sz="1500" b="0">
+                <a:solidFill>
+                  <a:srgbClr val="28303C"/>
+                </a:solidFill>
+              </a:rPr>
+              <a:t>báo “Bạn đã nhận được bản ghi từ …” → “Nhận &amp; Restore”, hoặc vào “Nhận từ user”.</a:t>
+            </a:r>
+          </a:p>
+          <a:p>
+            <a:pPr algn="l">
+              <a:spcAft>
+                <a:spcPts val="600"/>
+              </a:spcAft>
+            </a:pPr>
+            <a:r>
+              <a:rPr sz="1500" b="1">
+                <a:solidFill>
+                  <a:srgbClr val="005B9F"/>
+                </a:solidFill>
+              </a:rPr>
+              <a:t>▪ </a:t>
+            </a:r>
+            <a:r>
+              <a:rPr sz="1500" b="1">
+                <a:solidFill>
+                  <a:srgbClr val="28303C"/>
+                </a:solidFill>
+              </a:rPr>
+              <a:t>Bảo mật: </a:t>
+            </a:r>
+            <a:r>
+              <a:rPr sz="1500" b="0">
+                <a:solidFill>
+                  <a:srgbClr val="28303C"/>
+                </a:solidFill>
+              </a:rPr>
+              <a:t>chỉ user được cấp quyền mới giải mã được; bản ghi tự xóa sau 24 giờ.</a:t>
+            </a:r>
+          </a:p>
+          <a:p>
+            <a:pPr algn="l">
+              <a:spcAft>
+                <a:spcPts val="600"/>
+              </a:spcAft>
+            </a:pPr>
+            <a:r>
+              <a:rPr sz="1500" b="1">
+                <a:solidFill>
+                  <a:srgbClr val="005B9F"/>
+                </a:solidFill>
+              </a:rPr>
+              <a:t>▪ </a:t>
+            </a:r>
+            <a:r>
+              <a:rPr sz="1500" b="1">
+                <a:solidFill>
+                  <a:srgbClr val="28303C"/>
+                </a:solidFill>
+              </a:rPr>
+              <a:t>Tiện: </a:t>
+            </a:r>
+            <a:r>
+              <a:rPr sz="1500" b="0">
+                <a:solidFill>
+                  <a:srgbClr val="28303C"/>
+                </a:solidFill>
+              </a:rPr>
+              <a:t>có thể chọn 1 vài KH để gửi một phần dữ liệu khi bàn giao hồ sơ.</a:t>
+            </a:r>
+          </a:p>
+        </p:txBody>
+      </p:sp>
+      <p:pic>
+        <p:nvPicPr>
+          <p:cNvPr id="7" name="Picture 6" descr="18_inbox.png"/>
+          <p:cNvPicPr>
+            <a:picLocks noChangeAspect="1"/>
+          </p:cNvPicPr>
+          <p:nvPr/>
+        </p:nvPicPr>
+        <p:blipFill>
+          <a:blip r:embed="rId2"/>
+          <a:stretch>
+            <a:fillRect/>
+          </a:stretch>
+        </p:blipFill>
+        <p:spPr>
+          <a:xfrm>
+            <a:off x="9245031" y="685800"/>
+            <a:ext cx="2535185" cy="5486400"/>
+          </a:xfrm>
+          <a:prstGeom prst="rect">
+            <a:avLst/>
+          </a:prstGeom>
+          <a:ln w="12700">
+            <a:solidFill>
+              <a:srgbClr val="C9D6E4"/>
+            </a:solidFill>
+          </a:ln>
+        </p:spPr>
+      </p:pic>
+      <p:pic>
+        <p:nvPicPr>
+          <p:cNvPr id="8" name="Picture 7" descr="17_send_user.png"/>
+          <p:cNvPicPr>
+            <a:picLocks noChangeAspect="1"/>
+          </p:cNvPicPr>
+          <p:nvPr/>
+        </p:nvPicPr>
+        <p:blipFill>
+          <a:blip r:embed="rId3"/>
+          <a:stretch>
+            <a:fillRect/>
+          </a:stretch>
+        </p:blipFill>
+        <p:spPr>
+          <a:xfrm>
+            <a:off x="6508679" y="685800"/>
+            <a:ext cx="2535185" cy="5486400"/>
+          </a:xfrm>
+          <a:prstGeom prst="rect">
+            <a:avLst/>
+          </a:prstGeom>
+          <a:ln w="12700">
+            <a:solidFill>
+              <a:srgbClr val="C9D6E4"/>
+            </a:solidFill>
+          </a:ln>
+        </p:spPr>
+      </p:pic>
+    </p:spTree>
+  </p:cSld>
+  <p:clrMapOvr>
+    <a:masterClrMapping/>
+  </p:clrMapOvr>
+</p:sld>
+</file>
+
+<file path=ppt/slides/slide23.xml><?xml version="1.0" encoding="utf-8"?>
+<p:sld xmlns:a="http://schemas.openxmlformats.org/drawingml/2006/main" xmlns:p="http://schemas.openxmlformats.org/presentationml/2006/main" xmlns:r="http://schemas.openxmlformats.org/officeDocument/2006/relationships">
+  <p:cSld>
+    <p:spTree>
+      <p:nvGrpSpPr>
+        <p:cNvPr id="1" name=""/>
+        <p:cNvGrpSpPr/>
+        <p:nvPr/>
+      </p:nvGrpSpPr>
+      <p:grpSpPr/>
+      <p:sp>
+        <p:nvSpPr>
+          <p:cNvPr id="2" name="Rectangle 1"/>
+          <p:cNvSpPr/>
+          <p:nvPr/>
+        </p:nvSpPr>
+        <p:spPr>
+          <a:xfrm>
+            <a:off x="0" y="0"/>
+            <a:ext cx="12191695" cy="6858000"/>
+          </a:xfrm>
+          <a:prstGeom prst="rect">
+            <a:avLst/>
+          </a:prstGeom>
+          <a:solidFill>
+            <a:srgbClr val="FFFFFF"/>
+          </a:solidFill>
+          <a:ln>
+            <a:noFill/>
+          </a:ln>
+          <a:effectLst/>
+        </p:spPr>
+        <p:style>
+          <a:lnRef idx="1">
+            <a:schemeClr val="accent1"/>
+          </a:lnRef>
+          <a:fillRef idx="3">
+            <a:schemeClr val="accent1"/>
+          </a:fillRef>
+          <a:effectRef idx="2">
+            <a:schemeClr val="accent1"/>
+          </a:effectRef>
+          <a:fontRef idx="minor">
+            <a:schemeClr val="lt1"/>
+          </a:fontRef>
+        </p:style>
+        <p:txBody>
+          <a:bodyPr rtlCol="0" anchor="ctr"/>
+          <a:lstStyle/>
+          <a:p>
+            <a:pPr algn="ctr"/>
+          </a:p>
+        </p:txBody>
+      </p:sp>
+      <p:sp>
+        <p:nvSpPr>
+          <p:cNvPr id="3" name="Rectangle 2"/>
+          <p:cNvSpPr/>
+          <p:nvPr/>
+        </p:nvSpPr>
+        <p:spPr>
+          <a:xfrm>
+            <a:off x="0" y="0"/>
+            <a:ext cx="12191695" cy="128016"/>
+          </a:xfrm>
+          <a:prstGeom prst="rect">
+            <a:avLst/>
+          </a:prstGeom>
+          <a:solidFill>
+            <a:srgbClr val="005B9F"/>
+          </a:solidFill>
+          <a:ln>
+            <a:noFill/>
+          </a:ln>
+          <a:effectLst/>
+        </p:spPr>
+        <p:style>
+          <a:lnRef idx="1">
+            <a:schemeClr val="accent1"/>
+          </a:lnRef>
+          <a:fillRef idx="3">
+            <a:schemeClr val="accent1"/>
+          </a:fillRef>
+          <a:effectRef idx="2">
+            <a:schemeClr val="accent1"/>
+          </a:effectRef>
+          <a:fontRef idx="minor">
+            <a:schemeClr val="lt1"/>
+          </a:fontRef>
+        </p:style>
+        <p:txBody>
+          <a:bodyPr rtlCol="0" anchor="ctr"/>
+          <a:lstStyle/>
+          <a:p>
+            <a:pPr algn="ctr"/>
+          </a:p>
+        </p:txBody>
+      </p:sp>
+      <p:sp>
+        <p:nvSpPr>
+          <p:cNvPr id="4" name="TextBox 3"/>
+          <p:cNvSpPr txBox="1"/>
+          <p:nvPr/>
+        </p:nvSpPr>
+        <p:spPr>
+          <a:xfrm>
+            <a:off x="502920" y="438912"/>
+            <a:ext cx="7406640" cy="868680"/>
+          </a:xfrm>
+          <a:prstGeom prst="rect">
+            <a:avLst/>
+          </a:prstGeom>
+          <a:noFill/>
+        </p:spPr>
+        <p:txBody>
+          <a:bodyPr wrap="square" anchor="ctr">
+            <a:spAutoFit/>
+          </a:bodyPr>
+          <a:lstStyle/>
+          <a:p>
+            <a:pPr algn="l">
+              <a:spcAft>
+                <a:spcPts val="600"/>
+              </a:spcAft>
+            </a:pPr>
+            <a:r>
+              <a:rPr sz="2700" b="1">
+                <a:solidFill>
+                  <a:srgbClr val="0B2A4A"/>
+                </a:solidFill>
+              </a:rPr>
+              <a:t>Câu hỏi thường gặp</a:t>
+            </a:r>
+          </a:p>
+        </p:txBody>
+      </p:sp>
+      <p:sp>
+        <p:nvSpPr>
+          <p:cNvPr id="5" name="TextBox 4"/>
+          <p:cNvSpPr txBox="1"/>
+          <p:nvPr/>
+        </p:nvSpPr>
+        <p:spPr>
+          <a:xfrm>
+            <a:off x="566928" y="1600200"/>
+            <a:ext cx="7406640" cy="4480560"/>
+          </a:xfrm>
+          <a:prstGeom prst="rect">
+            <a:avLst/>
+          </a:prstGeom>
+          <a:noFill/>
+        </p:spPr>
+        <p:txBody>
+          <a:bodyPr wrap="square" anchor="t">
+            <a:spAutoFit/>
+          </a:bodyPr>
+          <a:lstStyle/>
+          <a:p>
+            <a:pPr algn="l">
+              <a:spcAft>
+                <a:spcPts val="600"/>
+              </a:spcAft>
+            </a:pPr>
+            <a:r>
+              <a:rPr sz="1500" b="1">
+                <a:solidFill>
+                  <a:srgbClr val="005B9F"/>
+                </a:solidFill>
+              </a:rPr>
+              <a:t>▪ </a:t>
+            </a:r>
+            <a:r>
+              <a:rPr sz="1500" b="1">
+                <a:solidFill>
+                  <a:srgbClr val="28303C"/>
+                </a:solidFill>
+              </a:rPr>
+              <a:t>Quên PIN? </a:t>
+            </a:r>
+            <a:r>
+              <a:rPr sz="1500" b="0">
+                <a:solidFill>
+                  <a:srgbClr val="28303C"/>
+                </a:solidFill>
+              </a:rPr>
+              <a:t>“Quên mã PIN?” + mã nhân viên → đặt PIN mới, không mất dữ liệu.</a:t>
+            </a:r>
+          </a:p>
+          <a:p>
+            <a:pPr algn="l">
+              <a:spcAft>
+                <a:spcPts val="600"/>
+              </a:spcAft>
+            </a:pPr>
+            <a:r>
+              <a:rPr sz="1500" b="1">
+                <a:solidFill>
+                  <a:srgbClr val="005B9F"/>
+                </a:solidFill>
+              </a:rPr>
+              <a:t>▪ </a:t>
+            </a:r>
+            <a:r>
+              <a:rPr sz="1500" b="1">
+                <a:solidFill>
+                  <a:srgbClr val="28303C"/>
+                </a:solidFill>
+              </a:rPr>
+              <a:t>Mất mạng? </a:t>
+            </a:r>
+            <a:r>
+              <a:rPr sz="1500" b="0">
+                <a:solidFill>
+                  <a:srgbClr val="28303C"/>
+                </a:solidFill>
+              </a:rPr>
+              <a:t>App vẫn dùng bình thường; chỉ backup/bản đồ/thời tiết tạm dừng.</a:t>
+            </a:r>
+          </a:p>
+          <a:p>
+            <a:pPr algn="l">
+              <a:spcAft>
+                <a:spcPts val="600"/>
+              </a:spcAft>
+            </a:pPr>
+            <a:r>
+              <a:rPr sz="1500" b="1">
+                <a:solidFill>
+                  <a:srgbClr val="005B9F"/>
+                </a:solidFill>
+              </a:rPr>
+              <a:t>▪ </a:t>
+            </a:r>
+            <a:r>
+              <a:rPr sz="1500" b="1">
+                <a:solidFill>
+                  <a:srgbClr val="28303C"/>
+                </a:solidFill>
+              </a:rPr>
+              <a:t>Xóa app có mất dữ liệu? </a:t>
+            </a:r>
+            <a:r>
+              <a:rPr sz="1500" b="0">
+                <a:solidFill>
+                  <a:srgbClr val="28303C"/>
+                </a:solidFill>
+              </a:rPr>
+              <a:t>Có, nếu chưa sao lưu — hãy bật auto-backup Drive.</a:t>
+            </a:r>
+          </a:p>
+          <a:p>
+            <a:pPr algn="l">
+              <a:spcAft>
+                <a:spcPts val="600"/>
+              </a:spcAft>
+            </a:pPr>
+            <a:r>
+              <a:rPr sz="1500" b="1">
+                <a:solidFill>
+                  <a:srgbClr val="005B9F"/>
+                </a:solidFill>
+              </a:rPr>
+              <a:t>▪ </a:t>
+            </a:r>
+            <a:r>
+              <a:rPr sz="1500" b="1">
+                <a:solidFill>
+                  <a:srgbClr val="28303C"/>
+                </a:solidFill>
+              </a:rPr>
+              <a:t>Gửi backup cho đồng nghiệp? </a:t>
+            </a:r>
+            <a:r>
+              <a:rPr sz="1500" b="0">
+                <a:solidFill>
+                  <a:srgbClr val="28303C"/>
+                </a:solidFill>
+              </a:rPr>
+              <a:t>Dùng nút “Gửi” — chỉ user được cấp quyền mới mở được, tự xóa sau 24h.</a:t>
+            </a:r>
+          </a:p>
+          <a:p>
+            <a:pPr algn="l">
+              <a:spcAft>
+                <a:spcPts val="600"/>
+              </a:spcAft>
+            </a:pPr>
+            <a:r>
+              <a:rPr sz="1500" b="1">
+                <a:solidFill>
+                  <a:srgbClr val="005B9F"/>
+                </a:solidFill>
+              </a:rPr>
+              <a:t>▪ </a:t>
+            </a:r>
+            <a:r>
+              <a:rPr sz="1500" b="1">
+                <a:solidFill>
+                  <a:srgbClr val="28303C"/>
+                </a:solidFill>
+              </a:rPr>
+              <a:t>Đổi điện thoại? </a:t>
+            </a:r>
+            <a:r>
+              <a:rPr sz="1500" b="0">
+                <a:solidFill>
+                  <a:srgbClr val="28303C"/>
+                </a:solidFill>
+              </a:rPr>
+              <a:t>Khôi phục từ Drive / file .cpb / “Nhận từ user”; nhờ quản trị viên cấp quyền máy mới.</a:t>
+            </a:r>
+          </a:p>
+        </p:txBody>
+      </p:sp>
+      <p:pic>
+        <p:nvPicPr>
+          <p:cNvPr id="6" name="Picture 5" descr="06_customer_list.png"/>
+          <p:cNvPicPr>
+            <a:picLocks noChangeAspect="1"/>
+          </p:cNvPicPr>
+          <p:nvPr/>
+        </p:nvPicPr>
+        <p:blipFill>
+          <a:blip r:embed="rId2"/>
+          <a:stretch>
+            <a:fillRect/>
+          </a:stretch>
+        </p:blipFill>
+        <p:spPr>
+          <a:xfrm>
+            <a:off x="8900072" y="411480"/>
+            <a:ext cx="2788703" cy="6035040"/>
+          </a:xfrm>
+          <a:prstGeom prst="rect">
+            <a:avLst/>
+          </a:prstGeom>
+          <a:ln w="12700">
+            <a:solidFill>
+              <a:srgbClr val="C9D6E4"/>
+            </a:solidFill>
+          </a:ln>
+        </p:spPr>
+      </p:pic>
+    </p:spTree>
+  </p:cSld>
+  <p:clrMapOvr>
+    <a:masterClrMapping/>
+  </p:clrMapOvr>
+</p:sld>
+</file>
+
+<file path=ppt/slides/slide24.xml><?xml version="1.0" encoding="utf-8"?>
+<p:sld xmlns:a="http://schemas.openxmlformats.org/drawingml/2006/main" xmlns:p="http://schemas.openxmlformats.org/presentationml/2006/main" xmlns:r="http://schemas.openxmlformats.org/officeDocument/2006/relationships">
+  <p:cSld>
+    <p:spTree>
+      <p:nvGrpSpPr>
+        <p:cNvPr id="1" name=""/>
+        <p:cNvGrpSpPr/>
+        <p:nvPr/>
+      </p:nvGrpSpPr>
+      <p:grpSpPr/>
+      <p:sp>
+        <p:nvSpPr>
+          <p:cNvPr id="2" name="Rectangle 1"/>
+          <p:cNvSpPr/>
+          <p:nvPr/>
+        </p:nvSpPr>
+        <p:spPr>
+          <a:xfrm>
+            <a:off x="0" y="0"/>
+            <a:ext cx="12191695" cy="6858000"/>
+          </a:xfrm>
+          <a:prstGeom prst="rect">
+            <a:avLst/>
+          </a:prstGeom>
+          <a:solidFill>
+            <a:srgbClr val="0B2A4A"/>
+          </a:solidFill>
+          <a:ln>
+            <a:noFill/>
+          </a:ln>
+          <a:effectLst/>
+        </p:spPr>
+        <p:style>
+          <a:lnRef idx="1">
+            <a:schemeClr val="accent1"/>
+          </a:lnRef>
+          <a:fillRef idx="3">
+            <a:schemeClr val="accent1"/>
+          </a:fillRef>
+          <a:effectRef idx="2">
+            <a:schemeClr val="accent1"/>
+          </a:effectRef>
+          <a:fontRef idx="minor">
+            <a:schemeClr val="lt1"/>
+          </a:fontRef>
+        </p:style>
+        <p:txBody>
+          <a:bodyPr rtlCol="0" anchor="ctr"/>
+          <a:lstStyle/>
+          <a:p>
+            <a:pPr algn="ctr"/>
+          </a:p>
+        </p:txBody>
+      </p:sp>
+      <p:sp>
+        <p:nvSpPr>
+          <p:cNvPr id="3" name="Rectangle 2"/>
+          <p:cNvSpPr/>
+          <p:nvPr/>
+        </p:nvSpPr>
+        <p:spPr>
+          <a:xfrm>
+            <a:off x="0" y="2788920"/>
+            <a:ext cx="12191695" cy="54864"/>
+          </a:xfrm>
+          <a:prstGeom prst="rect">
+            <a:avLst/>
+          </a:prstGeom>
+          <a:solidFill>
+            <a:srgbClr val="DA251D"/>
+          </a:solidFill>
+          <a:ln>
+            <a:noFill/>
+          </a:ln>
+          <a:effectLst/>
+        </p:spPr>
+        <p:style>
+          <a:lnRef idx="1">
+            <a:schemeClr val="accent1"/>
+          </a:lnRef>
+          <a:fillRef idx="3">
+            <a:schemeClr val="accent1"/>
+          </a:fillRef>
+          <a:effectRef idx="2">
+            <a:schemeClr val="accent1"/>
+          </a:effectRef>
+          <a:fontRef idx="minor">
+            <a:schemeClr val="lt1"/>
+          </a:fontRef>
+        </p:style>
+        <p:txBody>
+          <a:bodyPr rtlCol="0" anchor="ctr"/>
+          <a:lstStyle/>
+          <a:p>
+            <a:pPr algn="ctr"/>
+          </a:p>
+        </p:txBody>
+      </p:sp>
+      <p:sp>
+        <p:nvSpPr>
+          <p:cNvPr id="4" name="TextBox 3"/>
+          <p:cNvSpPr txBox="1"/>
+          <p:nvPr/>
+        </p:nvSpPr>
+        <p:spPr>
+          <a:xfrm>
+            <a:off x="914400" y="1554480"/>
+            <a:ext cx="10332720" cy="914400"/>
+          </a:xfrm>
+          <a:prstGeom prst="rect">
+            <a:avLst/>
+          </a:prstGeom>
+          <a:noFill/>
+        </p:spPr>
+        <p:txBody>
+          <a:bodyPr wrap="square" anchor="t">
+            <a:spAutoFit/>
+          </a:bodyPr>
+          <a:lstStyle/>
+          <a:p>
+            <a:pPr algn="ctr">
+              <a:spcAft>
+                <a:spcPts val="600"/>
+              </a:spcAft>
+            </a:pPr>
+            <a:r>
+              <a:rPr sz="3400" b="1">
+                <a:solidFill>
+                  <a:srgbClr val="FFFFFF"/>
+                </a:solidFill>
+              </a:rPr>
+              <a:t>Ghi nhớ 3 điều quan trọng</a:t>
+            </a:r>
+          </a:p>
+        </p:txBody>
+      </p:sp>
+      <p:sp>
+        <p:nvSpPr>
+          <p:cNvPr id="5" name="TextBox 4"/>
+          <p:cNvSpPr txBox="1"/>
+          <p:nvPr/>
+        </p:nvSpPr>
+        <p:spPr>
+          <a:xfrm>
+            <a:off x="2011680" y="3200400"/>
+            <a:ext cx="8229600" cy="2560320"/>
+          </a:xfrm>
+          <a:prstGeom prst="rect">
+            <a:avLst/>
+          </a:prstGeom>
+          <a:noFill/>
+        </p:spPr>
+        <p:txBody>
+          <a:bodyPr wrap="square" anchor="t">
+            <a:spAutoFit/>
+          </a:bodyPr>
+          <a:lstStyle/>
+          <a:p>
+            <a:pPr algn="l">
+              <a:spcAft>
+                <a:spcPts val="600"/>
+              </a:spcAft>
+            </a:pPr>
+            <a:r>
+              <a:rPr sz="2000" b="1">
+                <a:solidFill>
+                  <a:srgbClr val="FFFFFF"/>
+                </a:solidFill>
+              </a:rPr>
+              <a:t>1. Bật tự động sao lưu Google Drive ngay sau khi cài đặt.</a:t>
+            </a:r>
+          </a:p>
+          <a:p>
+            <a:pPr algn="l">
+              <a:spcAft>
+                <a:spcPts val="600"/>
+              </a:spcAft>
+            </a:pPr>
+            <a:r>
+              <a:rPr sz="2000" b="1">
+                <a:solidFill>
+                  <a:srgbClr val="FFFFFF"/>
+                </a:solidFill>
+              </a:rPr>
+              <a:t>2. Nhập chính xác mã nhân viên — chìa khóa duy nhất khi quên PIN.</a:t>
+            </a:r>
+          </a:p>
+          <a:p>
+            <a:pPr algn="l">
+              <a:spcAft>
+                <a:spcPts val="600"/>
+              </a:spcAft>
+            </a:pPr>
+            <a:r>
+              <a:rPr sz="2000" b="1">
+                <a:solidFill>
+                  <a:srgbClr val="FFFFFF"/>
+                </a:solidFill>
+              </a:rPr>
+              <a:t>3. Chuyển dữ liệu cho đồng nghiệp bằng chức năng “Gửi” trong Backup.</a:t>
+            </a:r>
+          </a:p>
+        </p:txBody>
+      </p:sp>
+      <p:sp>
+        <p:nvSpPr>
+          <p:cNvPr id="6" name="TextBox 5"/>
+          <p:cNvSpPr txBox="1"/>
+          <p:nvPr/>
+        </p:nvSpPr>
+        <p:spPr>
+          <a:xfrm>
+            <a:off x="914400" y="5943600"/>
+            <a:ext cx="10332720" cy="548640"/>
+          </a:xfrm>
+          <a:prstGeom prst="rect">
+            <a:avLst/>
+          </a:prstGeom>
+          <a:noFill/>
+        </p:spPr>
+        <p:txBody>
+          <a:bodyPr wrap="square" anchor="t">
+            <a:spAutoFit/>
+          </a:bodyPr>
+          <a:lstStyle/>
+          <a:p>
+            <a:pPr algn="ctr">
+              <a:spcAft>
+                <a:spcPts val="600"/>
+              </a:spcAft>
+            </a:pPr>
+            <a:r>
+              <a:rPr sz="1300" b="0">
+                <a:solidFill>
+                  <a:srgbClr val="9FB8D0"/>
+                </a:solidFill>
+              </a:rPr>
+              <a:t>ClientPro — Tài liệu hướng dẫn sử dụng • 07/2026</a:t>
+            </a:r>
+          </a:p>
+        </p:txBody>
+      </p:sp>
     </p:spTree>
   </p:cSld>
   <p:clrMapOvr>
@@ -7288,7 +9339,7 @@
         <p:spPr>
           <a:xfrm>
             <a:off x="502920" y="438912"/>
-            <a:ext cx="6949440" cy="868680"/>
+            <a:ext cx="7406640" cy="868680"/>
           </a:xfrm>
           <a:prstGeom prst="rect">
             <a:avLst/>
@@ -7639,7 +9690,7 @@
         <p:spPr>
           <a:xfrm>
             <a:off x="502920" y="438912"/>
-            <a:ext cx="6949440" cy="868680"/>
+            <a:ext cx="7406640" cy="868680"/>
           </a:xfrm>
           <a:prstGeom prst="rect">
             <a:avLst/>
@@ -7990,7 +10041,7 @@
         <p:spPr>
           <a:xfrm>
             <a:off x="502920" y="438912"/>
-            <a:ext cx="6949440" cy="868680"/>
+            <a:ext cx="7406640" cy="868680"/>
           </a:xfrm>
           <a:prstGeom prst="rect">
             <a:avLst/>
@@ -8341,7 +10392,7 @@
         <p:spPr>
           <a:xfrm>
             <a:off x="502920" y="438912"/>
-            <a:ext cx="6949440" cy="868680"/>
+            <a:ext cx="7406640" cy="868680"/>
           </a:xfrm>
           <a:prstGeom prst="rect">
             <a:avLst/>
@@ -8713,7 +10764,7 @@
         <p:spPr>
           <a:xfrm>
             <a:off x="1463040" y="438912"/>
-            <a:ext cx="6949440" cy="868680"/>
+            <a:ext cx="7406640" cy="868680"/>
           </a:xfrm>
           <a:prstGeom prst="rect">
             <a:avLst/>
@@ -9121,7 +11172,7 @@
         <p:spPr>
           <a:xfrm>
             <a:off x="1463040" y="438912"/>
-            <a:ext cx="6949440" cy="868680"/>
+            <a:ext cx="7406640" cy="868680"/>
           </a:xfrm>
           <a:prstGeom prst="rect">
             <a:avLst/>
@@ -9506,7 +11557,7 @@
         <p:spPr>
           <a:xfrm>
             <a:off x="1463040" y="438912"/>
-            <a:ext cx="6949440" cy="868680"/>
+            <a:ext cx="7406640" cy="868680"/>
           </a:xfrm>
           <a:prstGeom prst="rect">
             <a:avLst/>
